--- a/Presentacion_Programa_Austral.pptx
+++ b/Presentacion_Programa_Austral.pptx
@@ -15,6 +15,8 @@
     <p:sldId id="263" r:id="rId14"/>
     <p:sldId id="264" r:id="rId15"/>
     <p:sldId id="265" r:id="rId16"/>
+    <p:sldId id="266" r:id="rId17"/>
+    <p:sldId id="267" r:id="rId18"/>
   </p:sldIdLst>
   <p:sldSz cx="12191695" cy="6858000" type="screen4x3"/>
   <p:notesSz cx="6858000" cy="9144000"/>
@@ -3518,7 +3520,7 @@
                 </a:solidFill>
                 <a:latin typeface="Calibri"/>
               </a:rPr>
-              <a:t>CIERRE</a:t>
+              <a:t>DISEÑO</a:t>
             </a:r>
           </a:p>
         </p:txBody>
@@ -3553,7 +3555,7 @@
                 </a:solidFill>
                 <a:latin typeface="Calibri"/>
               </a:rPr>
-              <a:t>Próximos pasos</a:t>
+              <a:t>Qué implica para el diseño del programa</a:t>
             </a:r>
           </a:p>
         </p:txBody>
@@ -3624,6 +3626,2020 @@
                 <a:latin typeface="Calibri"/>
               </a:rPr>
               <a:t>10</a:t>
+            </a:r>
+          </a:p>
+        </p:txBody>
+      </p:sp>
+      <p:sp>
+        <p:nvSpPr>
+          <p:cNvPr id="7" name="Oval 6"/>
+          <p:cNvSpPr/>
+          <p:nvPr/>
+        </p:nvSpPr>
+        <p:spPr>
+          <a:xfrm>
+            <a:off x="731520" y="1783080"/>
+            <a:ext cx="457200" cy="457200"/>
+          </a:xfrm>
+          <a:prstGeom prst="ellipse">
+            <a:avLst/>
+          </a:prstGeom>
+          <a:solidFill>
+            <a:srgbClr val="1F5C3A"/>
+          </a:solidFill>
+          <a:ln>
+            <a:noFill/>
+          </a:ln>
+          <a:effectLst/>
+        </p:spPr>
+        <p:style>
+          <a:lnRef idx="1">
+            <a:schemeClr val="accent1"/>
+          </a:lnRef>
+          <a:fillRef idx="3">
+            <a:schemeClr val="accent1"/>
+          </a:fillRef>
+          <a:effectRef idx="2">
+            <a:schemeClr val="accent1"/>
+          </a:effectRef>
+          <a:fontRef idx="minor">
+            <a:schemeClr val="lt1"/>
+          </a:fontRef>
+        </p:style>
+        <p:txBody>
+          <a:bodyPr rtlCol="0" anchor="ctr" wrap="square" lIns="73152" rIns="73152"/>
+          <a:lstStyle/>
+          <a:p>
+            <a:pPr algn="ctr"/>
+            <a:r>
+              <a:rPr sz="1500" b="1">
+                <a:solidFill>
+                  <a:srgbClr val="FFFFFF"/>
+                </a:solidFill>
+                <a:latin typeface="Calibri"/>
+              </a:rPr>
+              <a:t>1</a:t>
+            </a:r>
+          </a:p>
+        </p:txBody>
+      </p:sp>
+      <p:sp>
+        <p:nvSpPr>
+          <p:cNvPr id="8" name="TextBox 7"/>
+          <p:cNvSpPr txBox="1"/>
+          <p:nvPr/>
+        </p:nvSpPr>
+        <p:spPr>
+          <a:xfrm>
+            <a:off x="1371600" y="1691640"/>
+            <a:ext cx="3291840" cy="640080"/>
+          </a:xfrm>
+          <a:prstGeom prst="rect">
+            <a:avLst/>
+          </a:prstGeom>
+          <a:noFill/>
+        </p:spPr>
+        <p:txBody>
+          <a:bodyPr wrap="square" lIns="45720" rIns="45720" tIns="27432" bIns="27432" anchor="ctr">
+            <a:spAutoFit/>
+          </a:bodyPr>
+          <a:lstStyle/>
+          <a:p>
+            <a:pPr algn="l"/>
+            <a:r>
+              <a:rPr sz="1800" b="1" i="0">
+                <a:solidFill>
+                  <a:srgbClr val="1E2A24"/>
+                </a:solidFill>
+                <a:latin typeface="Calibri"/>
+              </a:rPr>
+              <a:t>Casos reales</a:t>
+            </a:r>
+          </a:p>
+        </p:txBody>
+      </p:sp>
+      <p:sp>
+        <p:nvSpPr>
+          <p:cNvPr id="9" name="TextBox 8"/>
+          <p:cNvSpPr txBox="1"/>
+          <p:nvPr/>
+        </p:nvSpPr>
+        <p:spPr>
+          <a:xfrm>
+            <a:off x="4663440" y="1691640"/>
+            <a:ext cx="6858000" cy="640080"/>
+          </a:xfrm>
+          <a:prstGeom prst="rect">
+            <a:avLst/>
+          </a:prstGeom>
+          <a:noFill/>
+        </p:spPr>
+        <p:txBody>
+          <a:bodyPr wrap="square" lIns="45720" rIns="45720" tIns="27432" bIns="27432" anchor="ctr">
+            <a:spAutoFit/>
+          </a:bodyPr>
+          <a:lstStyle/>
+          <a:p>
+            <a:pPr algn="l"/>
+            <a:r>
+              <a:rPr sz="1600" b="0" i="0">
+                <a:solidFill>
+                  <a:srgbClr val="6B7A72"/>
+                </a:solidFill>
+                <a:latin typeface="Calibri"/>
+              </a:rPr>
+              <a:t>Trabajar situaciones concretas de COTAGRO, no teoría genérica.</a:t>
+            </a:r>
+          </a:p>
+        </p:txBody>
+      </p:sp>
+      <p:sp>
+        <p:nvSpPr>
+          <p:cNvPr id="10" name="Oval 9"/>
+          <p:cNvSpPr/>
+          <p:nvPr/>
+        </p:nvSpPr>
+        <p:spPr>
+          <a:xfrm>
+            <a:off x="731520" y="2697480"/>
+            <a:ext cx="457200" cy="457200"/>
+          </a:xfrm>
+          <a:prstGeom prst="ellipse">
+            <a:avLst/>
+          </a:prstGeom>
+          <a:solidFill>
+            <a:srgbClr val="1F5C3A"/>
+          </a:solidFill>
+          <a:ln>
+            <a:noFill/>
+          </a:ln>
+          <a:effectLst/>
+        </p:spPr>
+        <p:style>
+          <a:lnRef idx="1">
+            <a:schemeClr val="accent1"/>
+          </a:lnRef>
+          <a:fillRef idx="3">
+            <a:schemeClr val="accent1"/>
+          </a:fillRef>
+          <a:effectRef idx="2">
+            <a:schemeClr val="accent1"/>
+          </a:effectRef>
+          <a:fontRef idx="minor">
+            <a:schemeClr val="lt1"/>
+          </a:fontRef>
+        </p:style>
+        <p:txBody>
+          <a:bodyPr rtlCol="0" anchor="ctr" wrap="square" lIns="73152" rIns="73152"/>
+          <a:lstStyle/>
+          <a:p>
+            <a:pPr algn="ctr"/>
+            <a:r>
+              <a:rPr sz="1500" b="1">
+                <a:solidFill>
+                  <a:srgbClr val="FFFFFF"/>
+                </a:solidFill>
+                <a:latin typeface="Calibri"/>
+              </a:rPr>
+              <a:t>2</a:t>
+            </a:r>
+          </a:p>
+        </p:txBody>
+      </p:sp>
+      <p:sp>
+        <p:nvSpPr>
+          <p:cNvPr id="11" name="TextBox 10"/>
+          <p:cNvSpPr txBox="1"/>
+          <p:nvPr/>
+        </p:nvSpPr>
+        <p:spPr>
+          <a:xfrm>
+            <a:off x="1371600" y="2606040"/>
+            <a:ext cx="3291840" cy="640080"/>
+          </a:xfrm>
+          <a:prstGeom prst="rect">
+            <a:avLst/>
+          </a:prstGeom>
+          <a:noFill/>
+        </p:spPr>
+        <p:txBody>
+          <a:bodyPr wrap="square" lIns="45720" rIns="45720" tIns="27432" bIns="27432" anchor="ctr">
+            <a:spAutoFit/>
+          </a:bodyPr>
+          <a:lstStyle/>
+          <a:p>
+            <a:pPr algn="l"/>
+            <a:r>
+              <a:rPr sz="1800" b="1" i="0">
+                <a:solidFill>
+                  <a:srgbClr val="1E2A24"/>
+                </a:solidFill>
+                <a:latin typeface="Calibri"/>
+              </a:rPr>
+              <a:t>Referentes como mentores</a:t>
+            </a:r>
+          </a:p>
+        </p:txBody>
+      </p:sp>
+      <p:sp>
+        <p:nvSpPr>
+          <p:cNvPr id="12" name="TextBox 11"/>
+          <p:cNvSpPr txBox="1"/>
+          <p:nvPr/>
+        </p:nvSpPr>
+        <p:spPr>
+          <a:xfrm>
+            <a:off x="4663440" y="2606040"/>
+            <a:ext cx="6858000" cy="640080"/>
+          </a:xfrm>
+          <a:prstGeom prst="rect">
+            <a:avLst/>
+          </a:prstGeom>
+          <a:noFill/>
+        </p:spPr>
+        <p:txBody>
+          <a:bodyPr wrap="square" lIns="45720" rIns="45720" tIns="27432" bIns="27432" anchor="ctr">
+            <a:spAutoFit/>
+          </a:bodyPr>
+          <a:lstStyle/>
+          <a:p>
+            <a:pPr algn="l"/>
+            <a:r>
+              <a:rPr sz="1600" b="0" i="0">
+                <a:solidFill>
+                  <a:srgbClr val="6B7A72"/>
+                </a:solidFill>
+                <a:latin typeface="Calibri"/>
+              </a:rPr>
+              <a:t>Magallanes, Nicolino, Moressi y Nasi (Comunicación) cuentan casos y co-facilitan.</a:t>
+            </a:r>
+          </a:p>
+        </p:txBody>
+      </p:sp>
+      <p:sp>
+        <p:nvSpPr>
+          <p:cNvPr id="13" name="Oval 12"/>
+          <p:cNvSpPr/>
+          <p:nvPr/>
+        </p:nvSpPr>
+        <p:spPr>
+          <a:xfrm>
+            <a:off x="731520" y="3611880"/>
+            <a:ext cx="457200" cy="457200"/>
+          </a:xfrm>
+          <a:prstGeom prst="ellipse">
+            <a:avLst/>
+          </a:prstGeom>
+          <a:solidFill>
+            <a:srgbClr val="1F5C3A"/>
+          </a:solidFill>
+          <a:ln>
+            <a:noFill/>
+          </a:ln>
+          <a:effectLst/>
+        </p:spPr>
+        <p:style>
+          <a:lnRef idx="1">
+            <a:schemeClr val="accent1"/>
+          </a:lnRef>
+          <a:fillRef idx="3">
+            <a:schemeClr val="accent1"/>
+          </a:fillRef>
+          <a:effectRef idx="2">
+            <a:schemeClr val="accent1"/>
+          </a:effectRef>
+          <a:fontRef idx="minor">
+            <a:schemeClr val="lt1"/>
+          </a:fontRef>
+        </p:style>
+        <p:txBody>
+          <a:bodyPr rtlCol="0" anchor="ctr" wrap="square" lIns="73152" rIns="73152"/>
+          <a:lstStyle/>
+          <a:p>
+            <a:pPr algn="ctr"/>
+            <a:r>
+              <a:rPr sz="1500" b="1">
+                <a:solidFill>
+                  <a:srgbClr val="FFFFFF"/>
+                </a:solidFill>
+                <a:latin typeface="Calibri"/>
+              </a:rPr>
+              <a:t>3</a:t>
+            </a:r>
+          </a:p>
+        </p:txBody>
+      </p:sp>
+      <p:sp>
+        <p:nvSpPr>
+          <p:cNvPr id="14" name="TextBox 13"/>
+          <p:cNvSpPr txBox="1"/>
+          <p:nvPr/>
+        </p:nvSpPr>
+        <p:spPr>
+          <a:xfrm>
+            <a:off x="1371600" y="3520440"/>
+            <a:ext cx="3291840" cy="640080"/>
+          </a:xfrm>
+          <a:prstGeom prst="rect">
+            <a:avLst/>
+          </a:prstGeom>
+          <a:noFill/>
+        </p:spPr>
+        <p:txBody>
+          <a:bodyPr wrap="square" lIns="45720" rIns="45720" tIns="27432" bIns="27432" anchor="ctr">
+            <a:spAutoFit/>
+          </a:bodyPr>
+          <a:lstStyle/>
+          <a:p>
+            <a:pPr algn="l"/>
+            <a:r>
+              <a:rPr sz="1800" b="1" i="0">
+                <a:solidFill>
+                  <a:srgbClr val="1E2A24"/>
+                </a:solidFill>
+                <a:latin typeface="Calibri"/>
+              </a:rPr>
+              <a:t>Mezclar gerencias</a:t>
+            </a:r>
+          </a:p>
+        </p:txBody>
+      </p:sp>
+      <p:sp>
+        <p:nvSpPr>
+          <p:cNvPr id="15" name="TextBox 14"/>
+          <p:cNvSpPr txBox="1"/>
+          <p:nvPr/>
+        </p:nvSpPr>
+        <p:spPr>
+          <a:xfrm>
+            <a:off x="4663440" y="3520440"/>
+            <a:ext cx="6858000" cy="640080"/>
+          </a:xfrm>
+          <a:prstGeom prst="rect">
+            <a:avLst/>
+          </a:prstGeom>
+          <a:noFill/>
+        </p:spPr>
+        <p:txBody>
+          <a:bodyPr wrap="square" lIns="45720" rIns="45720" tIns="27432" bIns="27432" anchor="ctr">
+            <a:spAutoFit/>
+          </a:bodyPr>
+          <a:lstStyle/>
+          <a:p>
+            <a:pPr algn="l"/>
+            <a:r>
+              <a:rPr sz="1600" b="0" i="0">
+                <a:solidFill>
+                  <a:srgbClr val="6B7A72"/>
+                </a:solidFill>
+                <a:latin typeface="Calibri"/>
+              </a:rPr>
+              <a:t>Subgrupos cruzados para mejorar la comunicación entre áreas.</a:t>
+            </a:r>
+          </a:p>
+        </p:txBody>
+      </p:sp>
+      <p:sp>
+        <p:nvSpPr>
+          <p:cNvPr id="16" name="Oval 15"/>
+          <p:cNvSpPr/>
+          <p:nvPr/>
+        </p:nvSpPr>
+        <p:spPr>
+          <a:xfrm>
+            <a:off x="731520" y="4526279"/>
+            <a:ext cx="457200" cy="457200"/>
+          </a:xfrm>
+          <a:prstGeom prst="ellipse">
+            <a:avLst/>
+          </a:prstGeom>
+          <a:solidFill>
+            <a:srgbClr val="1F5C3A"/>
+          </a:solidFill>
+          <a:ln>
+            <a:noFill/>
+          </a:ln>
+          <a:effectLst/>
+        </p:spPr>
+        <p:style>
+          <a:lnRef idx="1">
+            <a:schemeClr val="accent1"/>
+          </a:lnRef>
+          <a:fillRef idx="3">
+            <a:schemeClr val="accent1"/>
+          </a:fillRef>
+          <a:effectRef idx="2">
+            <a:schemeClr val="accent1"/>
+          </a:effectRef>
+          <a:fontRef idx="minor">
+            <a:schemeClr val="lt1"/>
+          </a:fontRef>
+        </p:style>
+        <p:txBody>
+          <a:bodyPr rtlCol="0" anchor="ctr" wrap="square" lIns="73152" rIns="73152"/>
+          <a:lstStyle/>
+          <a:p>
+            <a:pPr algn="ctr"/>
+            <a:r>
+              <a:rPr sz="1500" b="1">
+                <a:solidFill>
+                  <a:srgbClr val="FFFFFF"/>
+                </a:solidFill>
+                <a:latin typeface="Calibri"/>
+              </a:rPr>
+              <a:t>4</a:t>
+            </a:r>
+          </a:p>
+        </p:txBody>
+      </p:sp>
+      <p:sp>
+        <p:nvSpPr>
+          <p:cNvPr id="17" name="TextBox 16"/>
+          <p:cNvSpPr txBox="1"/>
+          <p:nvPr/>
+        </p:nvSpPr>
+        <p:spPr>
+          <a:xfrm>
+            <a:off x="1371600" y="4434840"/>
+            <a:ext cx="3291840" cy="640080"/>
+          </a:xfrm>
+          <a:prstGeom prst="rect">
+            <a:avLst/>
+          </a:prstGeom>
+          <a:noFill/>
+        </p:spPr>
+        <p:txBody>
+          <a:bodyPr wrap="square" lIns="45720" rIns="45720" tIns="27432" bIns="27432" anchor="ctr">
+            <a:spAutoFit/>
+          </a:bodyPr>
+          <a:lstStyle/>
+          <a:p>
+            <a:pPr algn="l"/>
+            <a:r>
+              <a:rPr sz="1800" b="1" i="0">
+                <a:solidFill>
+                  <a:srgbClr val="1E2A24"/>
+                </a:solidFill>
+                <a:latin typeface="Calibri"/>
+              </a:rPr>
+              <a:t>Práctica entre encuentros</a:t>
+            </a:r>
+          </a:p>
+        </p:txBody>
+      </p:sp>
+      <p:sp>
+        <p:nvSpPr>
+          <p:cNvPr id="18" name="TextBox 17"/>
+          <p:cNvSpPr txBox="1"/>
+          <p:nvPr/>
+        </p:nvSpPr>
+        <p:spPr>
+          <a:xfrm>
+            <a:off x="4663440" y="4434840"/>
+            <a:ext cx="6858000" cy="640080"/>
+          </a:xfrm>
+          <a:prstGeom prst="rect">
+            <a:avLst/>
+          </a:prstGeom>
+          <a:noFill/>
+        </p:spPr>
+        <p:txBody>
+          <a:bodyPr wrap="square" lIns="45720" rIns="45720" tIns="27432" bIns="27432" anchor="ctr">
+            <a:spAutoFit/>
+          </a:bodyPr>
+          <a:lstStyle/>
+          <a:p>
+            <a:pPr algn="l"/>
+            <a:r>
+              <a:rPr sz="1600" b="0" i="0">
+                <a:solidFill>
+                  <a:srgbClr val="6B7A72"/>
+                </a:solidFill>
+                <a:latin typeface="Calibri"/>
+              </a:rPr>
+              <a:t>Un reto corto por semana, aplicado al puesto.</a:t>
+            </a:r>
+          </a:p>
+        </p:txBody>
+      </p:sp>
+      <p:sp>
+        <p:nvSpPr>
+          <p:cNvPr id="19" name="Oval 18"/>
+          <p:cNvSpPr/>
+          <p:nvPr/>
+        </p:nvSpPr>
+        <p:spPr>
+          <a:xfrm>
+            <a:off x="731520" y="5440679"/>
+            <a:ext cx="457200" cy="457200"/>
+          </a:xfrm>
+          <a:prstGeom prst="ellipse">
+            <a:avLst/>
+          </a:prstGeom>
+          <a:solidFill>
+            <a:srgbClr val="1F5C3A"/>
+          </a:solidFill>
+          <a:ln>
+            <a:noFill/>
+          </a:ln>
+          <a:effectLst/>
+        </p:spPr>
+        <p:style>
+          <a:lnRef idx="1">
+            <a:schemeClr val="accent1"/>
+          </a:lnRef>
+          <a:fillRef idx="3">
+            <a:schemeClr val="accent1"/>
+          </a:fillRef>
+          <a:effectRef idx="2">
+            <a:schemeClr val="accent1"/>
+          </a:effectRef>
+          <a:fontRef idx="minor">
+            <a:schemeClr val="lt1"/>
+          </a:fontRef>
+        </p:style>
+        <p:txBody>
+          <a:bodyPr rtlCol="0" anchor="ctr" wrap="square" lIns="73152" rIns="73152"/>
+          <a:lstStyle/>
+          <a:p>
+            <a:pPr algn="ctr"/>
+            <a:r>
+              <a:rPr sz="1500" b="1">
+                <a:solidFill>
+                  <a:srgbClr val="FFFFFF"/>
+                </a:solidFill>
+                <a:latin typeface="Calibri"/>
+              </a:rPr>
+              <a:t>5</a:t>
+            </a:r>
+          </a:p>
+        </p:txBody>
+      </p:sp>
+      <p:sp>
+        <p:nvSpPr>
+          <p:cNvPr id="20" name="TextBox 19"/>
+          <p:cNvSpPr txBox="1"/>
+          <p:nvPr/>
+        </p:nvSpPr>
+        <p:spPr>
+          <a:xfrm>
+            <a:off x="1371600" y="5349240"/>
+            <a:ext cx="3291840" cy="640080"/>
+          </a:xfrm>
+          <a:prstGeom prst="rect">
+            <a:avLst/>
+          </a:prstGeom>
+          <a:noFill/>
+        </p:spPr>
+        <p:txBody>
+          <a:bodyPr wrap="square" lIns="45720" rIns="45720" tIns="27432" bIns="27432" anchor="ctr">
+            <a:spAutoFit/>
+          </a:bodyPr>
+          <a:lstStyle/>
+          <a:p>
+            <a:pPr algn="l"/>
+            <a:r>
+              <a:rPr sz="1800" b="1" i="0">
+                <a:solidFill>
+                  <a:srgbClr val="1E2A24"/>
+                </a:solidFill>
+                <a:latin typeface="Calibri"/>
+              </a:rPr>
+              <a:t>Lenguaje simple</a:t>
+            </a:r>
+          </a:p>
+        </p:txBody>
+      </p:sp>
+      <p:sp>
+        <p:nvSpPr>
+          <p:cNvPr id="21" name="TextBox 20"/>
+          <p:cNvSpPr txBox="1"/>
+          <p:nvPr/>
+        </p:nvSpPr>
+        <p:spPr>
+          <a:xfrm>
+            <a:off x="4663440" y="5349240"/>
+            <a:ext cx="6858000" cy="640080"/>
+          </a:xfrm>
+          <a:prstGeom prst="rect">
+            <a:avLst/>
+          </a:prstGeom>
+          <a:noFill/>
+        </p:spPr>
+        <p:txBody>
+          <a:bodyPr wrap="square" lIns="45720" rIns="45720" tIns="27432" bIns="27432" anchor="ctr">
+            <a:spAutoFit/>
+          </a:bodyPr>
+          <a:lstStyle/>
+          <a:p>
+            <a:pPr algn="l"/>
+            <a:r>
+              <a:rPr sz="1600" b="0" i="0">
+                <a:solidFill>
+                  <a:srgbClr val="6B7A72"/>
+                </a:solidFill>
+                <a:latin typeface="Calibri"/>
+              </a:rPr>
+              <a:t>Herramientas de una hoja, ejemplos de campo, planta y oficina.</a:t>
+            </a:r>
+          </a:p>
+        </p:txBody>
+      </p:sp>
+    </p:spTree>
+  </p:cSld>
+  <p:clrMapOvr>
+    <a:masterClrMapping/>
+  </p:clrMapOvr>
+</p:sld>
+</file>
+
+<file path=ppt/slides/slide11.xml><?xml version="1.0" encoding="utf-8"?>
+<p:sld xmlns:a="http://schemas.openxmlformats.org/drawingml/2006/main" xmlns:p="http://schemas.openxmlformats.org/presentationml/2006/main" xmlns:r="http://schemas.openxmlformats.org/officeDocument/2006/relationships">
+  <p:cSld>
+    <p:spTree>
+      <p:nvGrpSpPr>
+        <p:cNvPr id="1" name=""/>
+        <p:cNvGrpSpPr/>
+        <p:nvPr/>
+      </p:nvGrpSpPr>
+      <p:grpSpPr/>
+      <p:sp>
+        <p:nvSpPr>
+          <p:cNvPr id="2" name="Rectangle 1"/>
+          <p:cNvSpPr/>
+          <p:nvPr/>
+        </p:nvSpPr>
+        <p:spPr>
+          <a:xfrm>
+            <a:off x="0" y="0"/>
+            <a:ext cx="201168" cy="6858000"/>
+          </a:xfrm>
+          <a:prstGeom prst="rect">
+            <a:avLst/>
+          </a:prstGeom>
+          <a:solidFill>
+            <a:srgbClr val="1F5C3A"/>
+          </a:solidFill>
+          <a:ln>
+            <a:noFill/>
+          </a:ln>
+          <a:effectLst/>
+        </p:spPr>
+        <p:style>
+          <a:lnRef idx="1">
+            <a:schemeClr val="accent1"/>
+          </a:lnRef>
+          <a:fillRef idx="3">
+            <a:schemeClr val="accent1"/>
+          </a:fillRef>
+          <a:effectRef idx="2">
+            <a:schemeClr val="accent1"/>
+          </a:effectRef>
+          <a:fontRef idx="minor">
+            <a:schemeClr val="lt1"/>
+          </a:fontRef>
+        </p:style>
+        <p:txBody>
+          <a:bodyPr rtlCol="0" anchor="ctr"/>
+          <a:lstStyle/>
+          <a:p>
+            <a:pPr algn="ctr"/>
+          </a:p>
+        </p:txBody>
+      </p:sp>
+      <p:sp>
+        <p:nvSpPr>
+          <p:cNvPr id="3" name="TextBox 2"/>
+          <p:cNvSpPr txBox="1"/>
+          <p:nvPr/>
+        </p:nvSpPr>
+        <p:spPr>
+          <a:xfrm>
+            <a:off x="640080" y="320040"/>
+            <a:ext cx="9144000" cy="320040"/>
+          </a:xfrm>
+          <a:prstGeom prst="rect">
+            <a:avLst/>
+          </a:prstGeom>
+          <a:noFill/>
+        </p:spPr>
+        <p:txBody>
+          <a:bodyPr wrap="square" lIns="45720" rIns="45720" tIns="27432" bIns="27432" anchor="t">
+            <a:spAutoFit/>
+          </a:bodyPr>
+          <a:lstStyle/>
+          <a:p>
+            <a:pPr algn="l"/>
+            <a:r>
+              <a:rPr sz="1200" b="1" i="0">
+                <a:solidFill>
+                  <a:srgbClr val="1F5C3A"/>
+                </a:solidFill>
+                <a:latin typeface="Calibri"/>
+              </a:rPr>
+              <a:t>SUBGRUPOS</a:t>
+            </a:r>
+          </a:p>
+        </p:txBody>
+      </p:sp>
+      <p:sp>
+        <p:nvSpPr>
+          <p:cNvPr id="4" name="TextBox 3"/>
+          <p:cNvSpPr txBox="1"/>
+          <p:nvPr/>
+        </p:nvSpPr>
+        <p:spPr>
+          <a:xfrm>
+            <a:off x="640080" y="594360"/>
+            <a:ext cx="10972800" cy="822960"/>
+          </a:xfrm>
+          <a:prstGeom prst="rect">
+            <a:avLst/>
+          </a:prstGeom>
+          <a:noFill/>
+        </p:spPr>
+        <p:txBody>
+          <a:bodyPr wrap="square" lIns="45720" rIns="45720" tIns="27432" bIns="27432" anchor="t">
+            <a:spAutoFit/>
+          </a:bodyPr>
+          <a:lstStyle/>
+          <a:p>
+            <a:pPr algn="l"/>
+            <a:r>
+              <a:rPr sz="3000" b="1" i="0">
+                <a:solidFill>
+                  <a:srgbClr val="1E2A24"/>
+                </a:solidFill>
+                <a:latin typeface="Calibri"/>
+              </a:rPr>
+              <a:t>Propuesta inicial de seis subgrupos</a:t>
+            </a:r>
+          </a:p>
+        </p:txBody>
+      </p:sp>
+      <p:sp>
+        <p:nvSpPr>
+          <p:cNvPr id="5" name="TextBox 4"/>
+          <p:cNvSpPr txBox="1"/>
+          <p:nvPr/>
+        </p:nvSpPr>
+        <p:spPr>
+          <a:xfrm>
+            <a:off x="640080" y="6400800"/>
+            <a:ext cx="7315200" cy="274320"/>
+          </a:xfrm>
+          <a:prstGeom prst="rect">
+            <a:avLst/>
+          </a:prstGeom>
+          <a:noFill/>
+        </p:spPr>
+        <p:txBody>
+          <a:bodyPr wrap="square" lIns="45720" rIns="45720" tIns="27432" bIns="27432" anchor="t">
+            <a:spAutoFit/>
+          </a:bodyPr>
+          <a:lstStyle/>
+          <a:p>
+            <a:pPr algn="l"/>
+            <a:r>
+              <a:rPr sz="1000" b="0" i="0">
+                <a:solidFill>
+                  <a:srgbClr val="6B7A72"/>
+                </a:solidFill>
+                <a:latin typeface="Calibri"/>
+              </a:rPr>
+              <a:t>Programa Austral · COTAGRO</a:t>
+            </a:r>
+          </a:p>
+        </p:txBody>
+      </p:sp>
+      <p:sp>
+        <p:nvSpPr>
+          <p:cNvPr id="6" name="TextBox 5"/>
+          <p:cNvSpPr txBox="1"/>
+          <p:nvPr/>
+        </p:nvSpPr>
+        <p:spPr>
+          <a:xfrm>
+            <a:off x="10972800" y="6400800"/>
+            <a:ext cx="640080" cy="274320"/>
+          </a:xfrm>
+          <a:prstGeom prst="rect">
+            <a:avLst/>
+          </a:prstGeom>
+          <a:noFill/>
+        </p:spPr>
+        <p:txBody>
+          <a:bodyPr wrap="square" lIns="45720" rIns="45720" tIns="27432" bIns="27432" anchor="t">
+            <a:spAutoFit/>
+          </a:bodyPr>
+          <a:lstStyle/>
+          <a:p>
+            <a:pPr algn="r"/>
+            <a:r>
+              <a:rPr sz="1000" b="0" i="0">
+                <a:solidFill>
+                  <a:srgbClr val="6B7A72"/>
+                </a:solidFill>
+                <a:latin typeface="Calibri"/>
+              </a:rPr>
+              <a:t>11</a:t>
+            </a:r>
+          </a:p>
+        </p:txBody>
+      </p:sp>
+      <p:sp>
+        <p:nvSpPr>
+          <p:cNvPr id="7" name="Rounded Rectangle 6"/>
+          <p:cNvSpPr/>
+          <p:nvPr/>
+        </p:nvSpPr>
+        <p:spPr>
+          <a:xfrm>
+            <a:off x="640080" y="1554480"/>
+            <a:ext cx="3566160" cy="2103120"/>
+          </a:xfrm>
+          <a:prstGeom prst="roundRect">
+            <a:avLst/>
+          </a:prstGeom>
+          <a:solidFill>
+            <a:srgbClr val="EAF2EC"/>
+          </a:solidFill>
+          <a:ln>
+            <a:noFill/>
+          </a:ln>
+          <a:effectLst/>
+        </p:spPr>
+        <p:style>
+          <a:lnRef idx="1">
+            <a:schemeClr val="accent1"/>
+          </a:lnRef>
+          <a:fillRef idx="3">
+            <a:schemeClr val="accent1"/>
+          </a:fillRef>
+          <a:effectRef idx="2">
+            <a:schemeClr val="accent1"/>
+          </a:effectRef>
+          <a:fontRef idx="minor">
+            <a:schemeClr val="lt1"/>
+          </a:fontRef>
+        </p:style>
+        <p:txBody>
+          <a:bodyPr rtlCol="0" anchor="ctr"/>
+          <a:lstStyle/>
+          <a:p>
+            <a:pPr algn="ctr"/>
+          </a:p>
+        </p:txBody>
+      </p:sp>
+      <p:sp>
+        <p:nvSpPr>
+          <p:cNvPr id="8" name="TextBox 7"/>
+          <p:cNvSpPr txBox="1"/>
+          <p:nvPr/>
+        </p:nvSpPr>
+        <p:spPr>
+          <a:xfrm>
+            <a:off x="777240" y="1627632"/>
+            <a:ext cx="3291840" cy="365760"/>
+          </a:xfrm>
+          <a:prstGeom prst="rect">
+            <a:avLst/>
+          </a:prstGeom>
+          <a:noFill/>
+        </p:spPr>
+        <p:txBody>
+          <a:bodyPr wrap="square" lIns="45720" rIns="45720" tIns="27432" bIns="27432" anchor="t">
+            <a:spAutoFit/>
+          </a:bodyPr>
+          <a:lstStyle/>
+          <a:p>
+            <a:pPr algn="l"/>
+            <a:r>
+              <a:rPr sz="1500" b="1" i="0">
+                <a:solidFill>
+                  <a:srgbClr val="1F5C3A"/>
+                </a:solidFill>
+                <a:latin typeface="Calibri"/>
+              </a:rPr>
+              <a:t>Grupo 1</a:t>
+            </a:r>
+          </a:p>
+        </p:txBody>
+      </p:sp>
+      <p:sp>
+        <p:nvSpPr>
+          <p:cNvPr id="9" name="TextBox 8"/>
+          <p:cNvSpPr txBox="1"/>
+          <p:nvPr/>
+        </p:nvSpPr>
+        <p:spPr>
+          <a:xfrm>
+            <a:off x="777240" y="2011680"/>
+            <a:ext cx="3337560" cy="1737360"/>
+          </a:xfrm>
+          <a:prstGeom prst="rect">
+            <a:avLst/>
+          </a:prstGeom>
+          <a:noFill/>
+        </p:spPr>
+        <p:txBody>
+          <a:bodyPr wrap="square" lIns="45720" rIns="45720" tIns="27432" bIns="27432" anchor="t">
+            <a:spAutoFit/>
+          </a:bodyPr>
+          <a:lstStyle/>
+          <a:p>
+            <a:pPr algn="l"/>
+            <a:r>
+              <a:rPr sz="1200" b="0" i="0">
+                <a:solidFill>
+                  <a:srgbClr val="1E2A24"/>
+                </a:solidFill>
+                <a:latin typeface="Calibri"/>
+              </a:rPr>
+              <a:t>Costamagna, Brian Nicolas · Agro</a:t>
+            </a:r>
+          </a:p>
+          <a:p>
+            <a:pPr algn="l"/>
+            <a:r>
+              <a:rPr sz="1200" b="0" i="0">
+                <a:solidFill>
+                  <a:srgbClr val="1E2A24"/>
+                </a:solidFill>
+                <a:latin typeface="Calibri"/>
+              </a:rPr>
+              <a:t>Lujan, Veronica Paola · Agro</a:t>
+            </a:r>
+          </a:p>
+          <a:p>
+            <a:pPr algn="l"/>
+            <a:r>
+              <a:rPr sz="1200" b="0" i="0">
+                <a:solidFill>
+                  <a:srgbClr val="1E2A24"/>
+                </a:solidFill>
+                <a:latin typeface="Calibri"/>
+              </a:rPr>
+              <a:t>Riberi, Esteban Miguel · Agro</a:t>
+            </a:r>
+          </a:p>
+          <a:p>
+            <a:pPr algn="l"/>
+            <a:r>
+              <a:rPr sz="1200" b="0" i="0">
+                <a:solidFill>
+                  <a:srgbClr val="1E2A24"/>
+                </a:solidFill>
+                <a:latin typeface="Calibri"/>
+              </a:rPr>
+              <a:t>Nicolino, Lucia Evelin · Agro</a:t>
+            </a:r>
+          </a:p>
+          <a:p>
+            <a:pPr algn="l"/>
+            <a:r>
+              <a:rPr sz="1200" b="0" i="0">
+                <a:solidFill>
+                  <a:srgbClr val="1E2A24"/>
+                </a:solidFill>
+                <a:latin typeface="Calibri"/>
+              </a:rPr>
+              <a:t>Nasi, Sara · Cultura Org.</a:t>
+            </a:r>
+          </a:p>
+        </p:txBody>
+      </p:sp>
+      <p:sp>
+        <p:nvSpPr>
+          <p:cNvPr id="10" name="Rounded Rectangle 9"/>
+          <p:cNvSpPr/>
+          <p:nvPr/>
+        </p:nvSpPr>
+        <p:spPr>
+          <a:xfrm>
+            <a:off x="4389120" y="1554480"/>
+            <a:ext cx="3566160" cy="2103120"/>
+          </a:xfrm>
+          <a:prstGeom prst="roundRect">
+            <a:avLst/>
+          </a:prstGeom>
+          <a:solidFill>
+            <a:srgbClr val="EAF2EC"/>
+          </a:solidFill>
+          <a:ln>
+            <a:noFill/>
+          </a:ln>
+          <a:effectLst/>
+        </p:spPr>
+        <p:style>
+          <a:lnRef idx="1">
+            <a:schemeClr val="accent1"/>
+          </a:lnRef>
+          <a:fillRef idx="3">
+            <a:schemeClr val="accent1"/>
+          </a:fillRef>
+          <a:effectRef idx="2">
+            <a:schemeClr val="accent1"/>
+          </a:effectRef>
+          <a:fontRef idx="minor">
+            <a:schemeClr val="lt1"/>
+          </a:fontRef>
+        </p:style>
+        <p:txBody>
+          <a:bodyPr rtlCol="0" anchor="ctr"/>
+          <a:lstStyle/>
+          <a:p>
+            <a:pPr algn="ctr"/>
+          </a:p>
+        </p:txBody>
+      </p:sp>
+      <p:sp>
+        <p:nvSpPr>
+          <p:cNvPr id="11" name="TextBox 10"/>
+          <p:cNvSpPr txBox="1"/>
+          <p:nvPr/>
+        </p:nvSpPr>
+        <p:spPr>
+          <a:xfrm>
+            <a:off x="4526280" y="1627632"/>
+            <a:ext cx="3291840" cy="365760"/>
+          </a:xfrm>
+          <a:prstGeom prst="rect">
+            <a:avLst/>
+          </a:prstGeom>
+          <a:noFill/>
+        </p:spPr>
+        <p:txBody>
+          <a:bodyPr wrap="square" lIns="45720" rIns="45720" tIns="27432" bIns="27432" anchor="t">
+            <a:spAutoFit/>
+          </a:bodyPr>
+          <a:lstStyle/>
+          <a:p>
+            <a:pPr algn="l"/>
+            <a:r>
+              <a:rPr sz="1500" b="1" i="0">
+                <a:solidFill>
+                  <a:srgbClr val="1F5C3A"/>
+                </a:solidFill>
+                <a:latin typeface="Calibri"/>
+              </a:rPr>
+              <a:t>Grupo 2</a:t>
+            </a:r>
+          </a:p>
+        </p:txBody>
+      </p:sp>
+      <p:sp>
+        <p:nvSpPr>
+          <p:cNvPr id="12" name="TextBox 11"/>
+          <p:cNvSpPr txBox="1"/>
+          <p:nvPr/>
+        </p:nvSpPr>
+        <p:spPr>
+          <a:xfrm>
+            <a:off x="4526280" y="2011680"/>
+            <a:ext cx="3337560" cy="1737360"/>
+          </a:xfrm>
+          <a:prstGeom prst="rect">
+            <a:avLst/>
+          </a:prstGeom>
+          <a:noFill/>
+        </p:spPr>
+        <p:txBody>
+          <a:bodyPr wrap="square" lIns="45720" rIns="45720" tIns="27432" bIns="27432" anchor="t">
+            <a:spAutoFit/>
+          </a:bodyPr>
+          <a:lstStyle/>
+          <a:p>
+            <a:pPr algn="l"/>
+            <a:r>
+              <a:rPr sz="1200" b="0" i="0">
+                <a:solidFill>
+                  <a:srgbClr val="1E2A24"/>
+                </a:solidFill>
+                <a:latin typeface="Calibri"/>
+              </a:rPr>
+              <a:t>Costamagna, Horacio Alberto · Agro</a:t>
+            </a:r>
+          </a:p>
+          <a:p>
+            <a:pPr algn="l"/>
+            <a:r>
+              <a:rPr sz="1200" b="0" i="0">
+                <a:solidFill>
+                  <a:srgbClr val="1E2A24"/>
+                </a:solidFill>
+                <a:latin typeface="Calibri"/>
+              </a:rPr>
+              <a:t>Caula, Sofia · Negocios Urbanos</a:t>
+            </a:r>
+          </a:p>
+          <a:p>
+            <a:pPr algn="l"/>
+            <a:r>
+              <a:rPr sz="1200" b="0" i="0">
+                <a:solidFill>
+                  <a:srgbClr val="1E2A24"/>
+                </a:solidFill>
+                <a:latin typeface="Calibri"/>
+              </a:rPr>
+              <a:t>Kretek, Juan Ignacio · Negocios Globales</a:t>
+            </a:r>
+          </a:p>
+          <a:p>
+            <a:pPr algn="l"/>
+            <a:r>
+              <a:rPr sz="1200" b="0" i="0">
+                <a:solidFill>
+                  <a:srgbClr val="1E2A24"/>
+                </a:solidFill>
+                <a:latin typeface="Calibri"/>
+              </a:rPr>
+              <a:t>Moressi, Gerardo · Agro</a:t>
+            </a:r>
+          </a:p>
+          <a:p>
+            <a:pPr algn="l"/>
+            <a:r>
+              <a:rPr sz="1200" b="0" i="0">
+                <a:solidFill>
+                  <a:srgbClr val="1E2A24"/>
+                </a:solidFill>
+                <a:latin typeface="Calibri"/>
+              </a:rPr>
+              <a:t>Kretek, Juan Pablo · IT y Admin.</a:t>
+            </a:r>
+          </a:p>
+        </p:txBody>
+      </p:sp>
+      <p:sp>
+        <p:nvSpPr>
+          <p:cNvPr id="13" name="Rounded Rectangle 12"/>
+          <p:cNvSpPr/>
+          <p:nvPr/>
+        </p:nvSpPr>
+        <p:spPr>
+          <a:xfrm>
+            <a:off x="8138159" y="1554480"/>
+            <a:ext cx="3566160" cy="2103120"/>
+          </a:xfrm>
+          <a:prstGeom prst="roundRect">
+            <a:avLst/>
+          </a:prstGeom>
+          <a:solidFill>
+            <a:srgbClr val="EAF2EC"/>
+          </a:solidFill>
+          <a:ln>
+            <a:noFill/>
+          </a:ln>
+          <a:effectLst/>
+        </p:spPr>
+        <p:style>
+          <a:lnRef idx="1">
+            <a:schemeClr val="accent1"/>
+          </a:lnRef>
+          <a:fillRef idx="3">
+            <a:schemeClr val="accent1"/>
+          </a:fillRef>
+          <a:effectRef idx="2">
+            <a:schemeClr val="accent1"/>
+          </a:effectRef>
+          <a:fontRef idx="minor">
+            <a:schemeClr val="lt1"/>
+          </a:fontRef>
+        </p:style>
+        <p:txBody>
+          <a:bodyPr rtlCol="0" anchor="ctr"/>
+          <a:lstStyle/>
+          <a:p>
+            <a:pPr algn="ctr"/>
+          </a:p>
+        </p:txBody>
+      </p:sp>
+      <p:sp>
+        <p:nvSpPr>
+          <p:cNvPr id="14" name="TextBox 13"/>
+          <p:cNvSpPr txBox="1"/>
+          <p:nvPr/>
+        </p:nvSpPr>
+        <p:spPr>
+          <a:xfrm>
+            <a:off x="8275319" y="1627632"/>
+            <a:ext cx="3291840" cy="365760"/>
+          </a:xfrm>
+          <a:prstGeom prst="rect">
+            <a:avLst/>
+          </a:prstGeom>
+          <a:noFill/>
+        </p:spPr>
+        <p:txBody>
+          <a:bodyPr wrap="square" lIns="45720" rIns="45720" tIns="27432" bIns="27432" anchor="t">
+            <a:spAutoFit/>
+          </a:bodyPr>
+          <a:lstStyle/>
+          <a:p>
+            <a:pPr algn="l"/>
+            <a:r>
+              <a:rPr sz="1500" b="1" i="0">
+                <a:solidFill>
+                  <a:srgbClr val="1F5C3A"/>
+                </a:solidFill>
+                <a:latin typeface="Calibri"/>
+              </a:rPr>
+              <a:t>Grupo 3</a:t>
+            </a:r>
+          </a:p>
+        </p:txBody>
+      </p:sp>
+      <p:sp>
+        <p:nvSpPr>
+          <p:cNvPr id="15" name="TextBox 14"/>
+          <p:cNvSpPr txBox="1"/>
+          <p:nvPr/>
+        </p:nvSpPr>
+        <p:spPr>
+          <a:xfrm>
+            <a:off x="8275319" y="2011680"/>
+            <a:ext cx="3337560" cy="1737360"/>
+          </a:xfrm>
+          <a:prstGeom prst="rect">
+            <a:avLst/>
+          </a:prstGeom>
+          <a:noFill/>
+        </p:spPr>
+        <p:txBody>
+          <a:bodyPr wrap="square" lIns="45720" rIns="45720" tIns="27432" bIns="27432" anchor="t">
+            <a:spAutoFit/>
+          </a:bodyPr>
+          <a:lstStyle/>
+          <a:p>
+            <a:pPr algn="l"/>
+            <a:r>
+              <a:rPr sz="1200" b="0" i="0">
+                <a:solidFill>
+                  <a:srgbClr val="1E2A24"/>
+                </a:solidFill>
+                <a:latin typeface="Calibri"/>
+              </a:rPr>
+              <a:t>Filippini, Danilo · Agro</a:t>
+            </a:r>
+          </a:p>
+          <a:p>
+            <a:pPr algn="l"/>
+            <a:r>
+              <a:rPr sz="1200" b="0" i="0">
+                <a:solidFill>
+                  <a:srgbClr val="1E2A24"/>
+                </a:solidFill>
+                <a:latin typeface="Calibri"/>
+              </a:rPr>
+              <a:t>Carrera, Noelia Maria · Negocios Globales</a:t>
+            </a:r>
+          </a:p>
+          <a:p>
+            <a:pPr algn="l"/>
+            <a:r>
+              <a:rPr sz="1200" b="0" i="0">
+                <a:solidFill>
+                  <a:srgbClr val="1E2A24"/>
+                </a:solidFill>
+                <a:latin typeface="Calibri"/>
+              </a:rPr>
+              <a:t>Monti, Johana Eugenia · Negocios Globales</a:t>
+            </a:r>
+          </a:p>
+          <a:p>
+            <a:pPr algn="l"/>
+            <a:r>
+              <a:rPr sz="1200" b="0" i="0">
+                <a:solidFill>
+                  <a:srgbClr val="1E2A24"/>
+                </a:solidFill>
+                <a:latin typeface="Calibri"/>
+              </a:rPr>
+              <a:t>Magallanes, Juan Martin · Agro</a:t>
+            </a:r>
+          </a:p>
+          <a:p>
+            <a:pPr algn="l"/>
+            <a:r>
+              <a:rPr sz="1200" b="0" i="0">
+                <a:solidFill>
+                  <a:srgbClr val="1E2A24"/>
+                </a:solidFill>
+                <a:latin typeface="Calibri"/>
+              </a:rPr>
+              <a:t>Perticarari, Dante · Proteína Animal</a:t>
+            </a:r>
+          </a:p>
+        </p:txBody>
+      </p:sp>
+      <p:sp>
+        <p:nvSpPr>
+          <p:cNvPr id="16" name="Rounded Rectangle 15"/>
+          <p:cNvSpPr/>
+          <p:nvPr/>
+        </p:nvSpPr>
+        <p:spPr>
+          <a:xfrm>
+            <a:off x="640080" y="3840480"/>
+            <a:ext cx="3566160" cy="2103120"/>
+          </a:xfrm>
+          <a:prstGeom prst="roundRect">
+            <a:avLst/>
+          </a:prstGeom>
+          <a:solidFill>
+            <a:srgbClr val="EAF2EC"/>
+          </a:solidFill>
+          <a:ln>
+            <a:noFill/>
+          </a:ln>
+          <a:effectLst/>
+        </p:spPr>
+        <p:style>
+          <a:lnRef idx="1">
+            <a:schemeClr val="accent1"/>
+          </a:lnRef>
+          <a:fillRef idx="3">
+            <a:schemeClr val="accent1"/>
+          </a:fillRef>
+          <a:effectRef idx="2">
+            <a:schemeClr val="accent1"/>
+          </a:effectRef>
+          <a:fontRef idx="minor">
+            <a:schemeClr val="lt1"/>
+          </a:fontRef>
+        </p:style>
+        <p:txBody>
+          <a:bodyPr rtlCol="0" anchor="ctr"/>
+          <a:lstStyle/>
+          <a:p>
+            <a:pPr algn="ctr"/>
+          </a:p>
+        </p:txBody>
+      </p:sp>
+      <p:sp>
+        <p:nvSpPr>
+          <p:cNvPr id="17" name="TextBox 16"/>
+          <p:cNvSpPr txBox="1"/>
+          <p:nvPr/>
+        </p:nvSpPr>
+        <p:spPr>
+          <a:xfrm>
+            <a:off x="777240" y="3913632"/>
+            <a:ext cx="3291840" cy="365760"/>
+          </a:xfrm>
+          <a:prstGeom prst="rect">
+            <a:avLst/>
+          </a:prstGeom>
+          <a:noFill/>
+        </p:spPr>
+        <p:txBody>
+          <a:bodyPr wrap="square" lIns="45720" rIns="45720" tIns="27432" bIns="27432" anchor="t">
+            <a:spAutoFit/>
+          </a:bodyPr>
+          <a:lstStyle/>
+          <a:p>
+            <a:pPr algn="l"/>
+            <a:r>
+              <a:rPr sz="1500" b="1" i="0">
+                <a:solidFill>
+                  <a:srgbClr val="1F5C3A"/>
+                </a:solidFill>
+                <a:latin typeface="Calibri"/>
+              </a:rPr>
+              <a:t>Grupo 4</a:t>
+            </a:r>
+          </a:p>
+        </p:txBody>
+      </p:sp>
+      <p:sp>
+        <p:nvSpPr>
+          <p:cNvPr id="18" name="TextBox 17"/>
+          <p:cNvSpPr txBox="1"/>
+          <p:nvPr/>
+        </p:nvSpPr>
+        <p:spPr>
+          <a:xfrm>
+            <a:off x="777240" y="4297680"/>
+            <a:ext cx="3337560" cy="1737360"/>
+          </a:xfrm>
+          <a:prstGeom prst="rect">
+            <a:avLst/>
+          </a:prstGeom>
+          <a:noFill/>
+        </p:spPr>
+        <p:txBody>
+          <a:bodyPr wrap="square" lIns="45720" rIns="45720" tIns="27432" bIns="27432" anchor="t">
+            <a:spAutoFit/>
+          </a:bodyPr>
+          <a:lstStyle/>
+          <a:p>
+            <a:pPr algn="l"/>
+            <a:r>
+              <a:rPr sz="1200" b="0" i="0">
+                <a:solidFill>
+                  <a:srgbClr val="1E2A24"/>
+                </a:solidFill>
+                <a:latin typeface="Calibri"/>
+              </a:rPr>
+              <a:t>Monetti, Luciano · Agro</a:t>
+            </a:r>
+          </a:p>
+          <a:p>
+            <a:pPr algn="l"/>
+            <a:r>
+              <a:rPr sz="1200" b="0" i="0">
+                <a:solidFill>
+                  <a:srgbClr val="1E2A24"/>
+                </a:solidFill>
+                <a:latin typeface="Calibri"/>
+              </a:rPr>
+              <a:t>Monetti, Tami Noelia · IT y Admin.</a:t>
+            </a:r>
+          </a:p>
+          <a:p>
+            <a:pPr algn="l"/>
+            <a:r>
+              <a:rPr sz="1200" b="0" i="0">
+                <a:solidFill>
+                  <a:srgbClr val="1E2A24"/>
+                </a:solidFill>
+                <a:latin typeface="Calibri"/>
+              </a:rPr>
+              <a:t>Vogler, Ignacio · Negocios Globales</a:t>
+            </a:r>
+          </a:p>
+          <a:p>
+            <a:pPr algn="l"/>
+            <a:r>
+              <a:rPr sz="1200" b="0" i="0">
+                <a:solidFill>
+                  <a:srgbClr val="1E2A24"/>
+                </a:solidFill>
+                <a:latin typeface="Calibri"/>
+              </a:rPr>
+              <a:t>Wolyniec, Ginette · Proteína Animal</a:t>
+            </a:r>
+          </a:p>
+          <a:p>
+            <a:pPr algn="l"/>
+            <a:r>
+              <a:rPr sz="1200" b="0" i="0">
+                <a:solidFill>
+                  <a:srgbClr val="1E2A24"/>
+                </a:solidFill>
+                <a:latin typeface="Calibri"/>
+              </a:rPr>
+              <a:t>Arias Maboli, Damian · Soporte</a:t>
+            </a:r>
+          </a:p>
+        </p:txBody>
+      </p:sp>
+      <p:sp>
+        <p:nvSpPr>
+          <p:cNvPr id="19" name="Rounded Rectangle 18"/>
+          <p:cNvSpPr/>
+          <p:nvPr/>
+        </p:nvSpPr>
+        <p:spPr>
+          <a:xfrm>
+            <a:off x="4389120" y="3840480"/>
+            <a:ext cx="3566160" cy="2103120"/>
+          </a:xfrm>
+          <a:prstGeom prst="roundRect">
+            <a:avLst/>
+          </a:prstGeom>
+          <a:solidFill>
+            <a:srgbClr val="EAF2EC"/>
+          </a:solidFill>
+          <a:ln>
+            <a:noFill/>
+          </a:ln>
+          <a:effectLst/>
+        </p:spPr>
+        <p:style>
+          <a:lnRef idx="1">
+            <a:schemeClr val="accent1"/>
+          </a:lnRef>
+          <a:fillRef idx="3">
+            <a:schemeClr val="accent1"/>
+          </a:fillRef>
+          <a:effectRef idx="2">
+            <a:schemeClr val="accent1"/>
+          </a:effectRef>
+          <a:fontRef idx="minor">
+            <a:schemeClr val="lt1"/>
+          </a:fontRef>
+        </p:style>
+        <p:txBody>
+          <a:bodyPr rtlCol="0" anchor="ctr"/>
+          <a:lstStyle/>
+          <a:p>
+            <a:pPr algn="ctr"/>
+          </a:p>
+        </p:txBody>
+      </p:sp>
+      <p:sp>
+        <p:nvSpPr>
+          <p:cNvPr id="20" name="TextBox 19"/>
+          <p:cNvSpPr txBox="1"/>
+          <p:nvPr/>
+        </p:nvSpPr>
+        <p:spPr>
+          <a:xfrm>
+            <a:off x="4526280" y="3913632"/>
+            <a:ext cx="3291840" cy="365760"/>
+          </a:xfrm>
+          <a:prstGeom prst="rect">
+            <a:avLst/>
+          </a:prstGeom>
+          <a:noFill/>
+        </p:spPr>
+        <p:txBody>
+          <a:bodyPr wrap="square" lIns="45720" rIns="45720" tIns="27432" bIns="27432" anchor="t">
+            <a:spAutoFit/>
+          </a:bodyPr>
+          <a:lstStyle/>
+          <a:p>
+            <a:pPr algn="l"/>
+            <a:r>
+              <a:rPr sz="1500" b="1" i="0">
+                <a:solidFill>
+                  <a:srgbClr val="1F5C3A"/>
+                </a:solidFill>
+                <a:latin typeface="Calibri"/>
+              </a:rPr>
+              <a:t>Grupo 5</a:t>
+            </a:r>
+          </a:p>
+        </p:txBody>
+      </p:sp>
+      <p:sp>
+        <p:nvSpPr>
+          <p:cNvPr id="21" name="TextBox 20"/>
+          <p:cNvSpPr txBox="1"/>
+          <p:nvPr/>
+        </p:nvSpPr>
+        <p:spPr>
+          <a:xfrm>
+            <a:off x="4526280" y="4297680"/>
+            <a:ext cx="3337560" cy="1737360"/>
+          </a:xfrm>
+          <a:prstGeom prst="rect">
+            <a:avLst/>
+          </a:prstGeom>
+          <a:noFill/>
+        </p:spPr>
+        <p:txBody>
+          <a:bodyPr wrap="square" lIns="45720" rIns="45720" tIns="27432" bIns="27432" anchor="t">
+            <a:spAutoFit/>
+          </a:bodyPr>
+          <a:lstStyle/>
+          <a:p>
+            <a:pPr algn="l"/>
+            <a:r>
+              <a:rPr sz="1200" b="0" i="0">
+                <a:solidFill>
+                  <a:srgbClr val="1E2A24"/>
+                </a:solidFill>
+                <a:latin typeface="Calibri"/>
+              </a:rPr>
+              <a:t>Przysiezny, Joaquin · Agro</a:t>
+            </a:r>
+          </a:p>
+          <a:p>
+            <a:pPr algn="l"/>
+            <a:r>
+              <a:rPr sz="1200" b="0" i="0">
+                <a:solidFill>
+                  <a:srgbClr val="1E2A24"/>
+                </a:solidFill>
+                <a:latin typeface="Calibri"/>
+              </a:rPr>
+              <a:t>Kretek, Juan Manuel · Finanzas</a:t>
+            </a:r>
+          </a:p>
+          <a:p>
+            <a:pPr algn="l"/>
+            <a:r>
+              <a:rPr sz="1200" b="0" i="0">
+                <a:solidFill>
+                  <a:srgbClr val="1E2A24"/>
+                </a:solidFill>
+                <a:latin typeface="Calibri"/>
+              </a:rPr>
+              <a:t>Gonzalez, Maximiliano · Proteína Animal</a:t>
+            </a:r>
+          </a:p>
+          <a:p>
+            <a:pPr algn="l"/>
+            <a:r>
+              <a:rPr sz="1200" b="0" i="0">
+                <a:solidFill>
+                  <a:srgbClr val="1E2A24"/>
+                </a:solidFill>
+                <a:latin typeface="Calibri"/>
+              </a:rPr>
+              <a:t>Sentous, Martin Ernesto · Proteína Animal</a:t>
+            </a:r>
+          </a:p>
+          <a:p>
+            <a:pPr algn="l"/>
+            <a:r>
+              <a:rPr sz="1200" b="0" i="0">
+                <a:solidFill>
+                  <a:srgbClr val="1E2A24"/>
+                </a:solidFill>
+                <a:latin typeface="Calibri"/>
+              </a:rPr>
+              <a:t>Bruno, Pedro Lujan · Negocios Urbanos</a:t>
+            </a:r>
+          </a:p>
+        </p:txBody>
+      </p:sp>
+      <p:sp>
+        <p:nvSpPr>
+          <p:cNvPr id="22" name="Rounded Rectangle 21"/>
+          <p:cNvSpPr/>
+          <p:nvPr/>
+        </p:nvSpPr>
+        <p:spPr>
+          <a:xfrm>
+            <a:off x="8138159" y="3840480"/>
+            <a:ext cx="3566160" cy="2103120"/>
+          </a:xfrm>
+          <a:prstGeom prst="roundRect">
+            <a:avLst/>
+          </a:prstGeom>
+          <a:solidFill>
+            <a:srgbClr val="EAF2EC"/>
+          </a:solidFill>
+          <a:ln>
+            <a:noFill/>
+          </a:ln>
+          <a:effectLst/>
+        </p:spPr>
+        <p:style>
+          <a:lnRef idx="1">
+            <a:schemeClr val="accent1"/>
+          </a:lnRef>
+          <a:fillRef idx="3">
+            <a:schemeClr val="accent1"/>
+          </a:fillRef>
+          <a:effectRef idx="2">
+            <a:schemeClr val="accent1"/>
+          </a:effectRef>
+          <a:fontRef idx="minor">
+            <a:schemeClr val="lt1"/>
+          </a:fontRef>
+        </p:style>
+        <p:txBody>
+          <a:bodyPr rtlCol="0" anchor="ctr"/>
+          <a:lstStyle/>
+          <a:p>
+            <a:pPr algn="ctr"/>
+          </a:p>
+        </p:txBody>
+      </p:sp>
+      <p:sp>
+        <p:nvSpPr>
+          <p:cNvPr id="23" name="TextBox 22"/>
+          <p:cNvSpPr txBox="1"/>
+          <p:nvPr/>
+        </p:nvSpPr>
+        <p:spPr>
+          <a:xfrm>
+            <a:off x="8275319" y="3913632"/>
+            <a:ext cx="3291840" cy="365760"/>
+          </a:xfrm>
+          <a:prstGeom prst="rect">
+            <a:avLst/>
+          </a:prstGeom>
+          <a:noFill/>
+        </p:spPr>
+        <p:txBody>
+          <a:bodyPr wrap="square" lIns="45720" rIns="45720" tIns="27432" bIns="27432" anchor="t">
+            <a:spAutoFit/>
+          </a:bodyPr>
+          <a:lstStyle/>
+          <a:p>
+            <a:pPr algn="l"/>
+            <a:r>
+              <a:rPr sz="1500" b="1" i="0">
+                <a:solidFill>
+                  <a:srgbClr val="1F5C3A"/>
+                </a:solidFill>
+                <a:latin typeface="Calibri"/>
+              </a:rPr>
+              <a:t>Grupo 6</a:t>
+            </a:r>
+          </a:p>
+        </p:txBody>
+      </p:sp>
+      <p:sp>
+        <p:nvSpPr>
+          <p:cNvPr id="24" name="TextBox 23"/>
+          <p:cNvSpPr txBox="1"/>
+          <p:nvPr/>
+        </p:nvSpPr>
+        <p:spPr>
+          <a:xfrm>
+            <a:off x="8275319" y="4297680"/>
+            <a:ext cx="3337560" cy="1737360"/>
+          </a:xfrm>
+          <a:prstGeom prst="rect">
+            <a:avLst/>
+          </a:prstGeom>
+          <a:noFill/>
+        </p:spPr>
+        <p:txBody>
+          <a:bodyPr wrap="square" lIns="45720" rIns="45720" tIns="27432" bIns="27432" anchor="t">
+            <a:spAutoFit/>
+          </a:bodyPr>
+          <a:lstStyle/>
+          <a:p>
+            <a:pPr algn="l"/>
+            <a:r>
+              <a:rPr sz="1200" b="0" i="0">
+                <a:solidFill>
+                  <a:srgbClr val="1E2A24"/>
+                </a:solidFill>
+                <a:latin typeface="Calibri"/>
+              </a:rPr>
+              <a:t>Amprino, Gisela Soledad · Cultura Org.</a:t>
+            </a:r>
+          </a:p>
+          <a:p>
+            <a:pPr algn="l"/>
+            <a:r>
+              <a:rPr sz="1200" b="0" i="0">
+                <a:solidFill>
+                  <a:srgbClr val="1E2A24"/>
+                </a:solidFill>
+                <a:latin typeface="Calibri"/>
+              </a:rPr>
+              <a:t>Zottola, Benjamin · Cultura Org.</a:t>
+            </a:r>
+          </a:p>
+          <a:p>
+            <a:pPr algn="l"/>
+            <a:r>
+              <a:rPr sz="1200" b="0" i="0">
+                <a:solidFill>
+                  <a:srgbClr val="1E2A24"/>
+                </a:solidFill>
+                <a:latin typeface="Calibri"/>
+              </a:rPr>
+              <a:t>Nasi, Gabriela Cristina · Proteína Animal</a:t>
+            </a:r>
+          </a:p>
+          <a:p>
+            <a:pPr algn="l"/>
+            <a:r>
+              <a:rPr sz="1200" b="0" i="0">
+                <a:solidFill>
+                  <a:srgbClr val="1E2A24"/>
+                </a:solidFill>
+                <a:latin typeface="Calibri"/>
+              </a:rPr>
+              <a:t>Oviedo, Julieta · Proteína Animal</a:t>
+            </a:r>
+          </a:p>
+        </p:txBody>
+      </p:sp>
+      <p:sp>
+        <p:nvSpPr>
+          <p:cNvPr id="25" name="TextBox 24"/>
+          <p:cNvSpPr txBox="1"/>
+          <p:nvPr/>
+        </p:nvSpPr>
+        <p:spPr>
+          <a:xfrm>
+            <a:off x="640080" y="6080760"/>
+            <a:ext cx="10972800" cy="274320"/>
+          </a:xfrm>
+          <a:prstGeom prst="rect">
+            <a:avLst/>
+          </a:prstGeom>
+          <a:noFill/>
+        </p:spPr>
+        <p:txBody>
+          <a:bodyPr wrap="square" lIns="45720" rIns="45720" tIns="27432" bIns="27432" anchor="t">
+            <a:spAutoFit/>
+          </a:bodyPr>
+          <a:lstStyle/>
+          <a:p>
+            <a:pPr algn="l"/>
+            <a:r>
+              <a:rPr sz="1200" b="0" i="1">
+                <a:solidFill>
+                  <a:srgbClr val="6B7A72"/>
+                </a:solidFill>
+                <a:latin typeface="Calibri"/>
+              </a:rPr>
+              <a:t>Borrador para ajustar con criterio propio y con las gerencias.</a:t>
+            </a:r>
+          </a:p>
+        </p:txBody>
+      </p:sp>
+    </p:spTree>
+  </p:cSld>
+  <p:clrMapOvr>
+    <a:masterClrMapping/>
+  </p:clrMapOvr>
+</p:sld>
+</file>
+
+<file path=ppt/slides/slide12.xml><?xml version="1.0" encoding="utf-8"?>
+<p:sld xmlns:a="http://schemas.openxmlformats.org/drawingml/2006/main" xmlns:p="http://schemas.openxmlformats.org/presentationml/2006/main" xmlns:r="http://schemas.openxmlformats.org/officeDocument/2006/relationships">
+  <p:cSld>
+    <p:spTree>
+      <p:nvGrpSpPr>
+        <p:cNvPr id="1" name=""/>
+        <p:cNvGrpSpPr/>
+        <p:nvPr/>
+      </p:nvGrpSpPr>
+      <p:grpSpPr/>
+      <p:sp>
+        <p:nvSpPr>
+          <p:cNvPr id="2" name="Rectangle 1"/>
+          <p:cNvSpPr/>
+          <p:nvPr/>
+        </p:nvSpPr>
+        <p:spPr>
+          <a:xfrm>
+            <a:off x="0" y="0"/>
+            <a:ext cx="201168" cy="6858000"/>
+          </a:xfrm>
+          <a:prstGeom prst="rect">
+            <a:avLst/>
+          </a:prstGeom>
+          <a:solidFill>
+            <a:srgbClr val="1F5C3A"/>
+          </a:solidFill>
+          <a:ln>
+            <a:noFill/>
+          </a:ln>
+          <a:effectLst/>
+        </p:spPr>
+        <p:style>
+          <a:lnRef idx="1">
+            <a:schemeClr val="accent1"/>
+          </a:lnRef>
+          <a:fillRef idx="3">
+            <a:schemeClr val="accent1"/>
+          </a:fillRef>
+          <a:effectRef idx="2">
+            <a:schemeClr val="accent1"/>
+          </a:effectRef>
+          <a:fontRef idx="minor">
+            <a:schemeClr val="lt1"/>
+          </a:fontRef>
+        </p:style>
+        <p:txBody>
+          <a:bodyPr rtlCol="0" anchor="ctr"/>
+          <a:lstStyle/>
+          <a:p>
+            <a:pPr algn="ctr"/>
+          </a:p>
+        </p:txBody>
+      </p:sp>
+      <p:sp>
+        <p:nvSpPr>
+          <p:cNvPr id="3" name="TextBox 2"/>
+          <p:cNvSpPr txBox="1"/>
+          <p:nvPr/>
+        </p:nvSpPr>
+        <p:spPr>
+          <a:xfrm>
+            <a:off x="640080" y="320040"/>
+            <a:ext cx="9144000" cy="320040"/>
+          </a:xfrm>
+          <a:prstGeom prst="rect">
+            <a:avLst/>
+          </a:prstGeom>
+          <a:noFill/>
+        </p:spPr>
+        <p:txBody>
+          <a:bodyPr wrap="square" lIns="45720" rIns="45720" tIns="27432" bIns="27432" anchor="t">
+            <a:spAutoFit/>
+          </a:bodyPr>
+          <a:lstStyle/>
+          <a:p>
+            <a:pPr algn="l"/>
+            <a:r>
+              <a:rPr sz="1200" b="1" i="0">
+                <a:solidFill>
+                  <a:srgbClr val="1F5C3A"/>
+                </a:solidFill>
+                <a:latin typeface="Calibri"/>
+              </a:rPr>
+              <a:t>CIERRE</a:t>
+            </a:r>
+          </a:p>
+        </p:txBody>
+      </p:sp>
+      <p:sp>
+        <p:nvSpPr>
+          <p:cNvPr id="4" name="TextBox 3"/>
+          <p:cNvSpPr txBox="1"/>
+          <p:nvPr/>
+        </p:nvSpPr>
+        <p:spPr>
+          <a:xfrm>
+            <a:off x="640080" y="594360"/>
+            <a:ext cx="10972800" cy="822960"/>
+          </a:xfrm>
+          <a:prstGeom prst="rect">
+            <a:avLst/>
+          </a:prstGeom>
+          <a:noFill/>
+        </p:spPr>
+        <p:txBody>
+          <a:bodyPr wrap="square" lIns="45720" rIns="45720" tIns="27432" bIns="27432" anchor="t">
+            <a:spAutoFit/>
+          </a:bodyPr>
+          <a:lstStyle/>
+          <a:p>
+            <a:pPr algn="l"/>
+            <a:r>
+              <a:rPr sz="3000" b="1" i="0">
+                <a:solidFill>
+                  <a:srgbClr val="1E2A24"/>
+                </a:solidFill>
+                <a:latin typeface="Calibri"/>
+              </a:rPr>
+              <a:t>Próximos pasos</a:t>
+            </a:r>
+          </a:p>
+        </p:txBody>
+      </p:sp>
+      <p:sp>
+        <p:nvSpPr>
+          <p:cNvPr id="5" name="TextBox 4"/>
+          <p:cNvSpPr txBox="1"/>
+          <p:nvPr/>
+        </p:nvSpPr>
+        <p:spPr>
+          <a:xfrm>
+            <a:off x="640080" y="6400800"/>
+            <a:ext cx="7315200" cy="274320"/>
+          </a:xfrm>
+          <a:prstGeom prst="rect">
+            <a:avLst/>
+          </a:prstGeom>
+          <a:noFill/>
+        </p:spPr>
+        <p:txBody>
+          <a:bodyPr wrap="square" lIns="45720" rIns="45720" tIns="27432" bIns="27432" anchor="t">
+            <a:spAutoFit/>
+          </a:bodyPr>
+          <a:lstStyle/>
+          <a:p>
+            <a:pPr algn="l"/>
+            <a:r>
+              <a:rPr sz="1000" b="0" i="0">
+                <a:solidFill>
+                  <a:srgbClr val="6B7A72"/>
+                </a:solidFill>
+                <a:latin typeface="Calibri"/>
+              </a:rPr>
+              <a:t>Programa Austral · COTAGRO</a:t>
+            </a:r>
+          </a:p>
+        </p:txBody>
+      </p:sp>
+      <p:sp>
+        <p:nvSpPr>
+          <p:cNvPr id="6" name="TextBox 5"/>
+          <p:cNvSpPr txBox="1"/>
+          <p:nvPr/>
+        </p:nvSpPr>
+        <p:spPr>
+          <a:xfrm>
+            <a:off x="10972800" y="6400800"/>
+            <a:ext cx="640080" cy="274320"/>
+          </a:xfrm>
+          <a:prstGeom prst="rect">
+            <a:avLst/>
+          </a:prstGeom>
+          <a:noFill/>
+        </p:spPr>
+        <p:txBody>
+          <a:bodyPr wrap="square" lIns="45720" rIns="45720" tIns="27432" bIns="27432" anchor="t">
+            <a:spAutoFit/>
+          </a:bodyPr>
+          <a:lstStyle/>
+          <a:p>
+            <a:pPr algn="r"/>
+            <a:r>
+              <a:rPr sz="1000" b="0" i="0">
+                <a:solidFill>
+                  <a:srgbClr val="6B7A72"/>
+                </a:solidFill>
+                <a:latin typeface="Calibri"/>
+              </a:rPr>
+              <a:t>12</a:t>
             </a:r>
           </a:p>
         </p:txBody>
@@ -9007,6 +11023,41 @@
           </a:p>
         </p:txBody>
       </p:sp>
+      <p:sp>
+        <p:nvSpPr>
+          <p:cNvPr id="30" name="TextBox 29"/>
+          <p:cNvSpPr txBox="1"/>
+          <p:nvPr/>
+        </p:nvSpPr>
+        <p:spPr>
+          <a:xfrm>
+            <a:off x="3291840" y="6400800"/>
+            <a:ext cx="5669280" cy="274320"/>
+          </a:xfrm>
+          <a:prstGeom prst="rect">
+            <a:avLst/>
+          </a:prstGeom>
+          <a:noFill/>
+        </p:spPr>
+        <p:txBody>
+          <a:bodyPr wrap="square" lIns="45720" rIns="45720" tIns="27432" bIns="27432" anchor="t">
+            <a:spAutoFit/>
+          </a:bodyPr>
+          <a:lstStyle/>
+          <a:p>
+            <a:pPr algn="ctr"/>
+            <a:r>
+              <a:rPr sz="1000" b="0" i="0">
+                <a:solidFill>
+                  <a:srgbClr val="6B7A72"/>
+                </a:solidFill>
+                <a:latin typeface="Calibri"/>
+              </a:rPr>
+              <a:t>Basado en el modelo de Ned Herrmann</a:t>
+            </a:r>
+          </a:p>
+        </p:txBody>
+      </p:sp>
     </p:spTree>
   </p:cSld>
   <p:clrMapOvr>
@@ -10450,6 +12501,41 @@
           </a:p>
         </p:txBody>
       </p:sp>
+      <p:sp>
+        <p:nvSpPr>
+          <p:cNvPr id="38" name="TextBox 37"/>
+          <p:cNvSpPr txBox="1"/>
+          <p:nvPr/>
+        </p:nvSpPr>
+        <p:spPr>
+          <a:xfrm>
+            <a:off x="3291840" y="6400800"/>
+            <a:ext cx="5669280" cy="274320"/>
+          </a:xfrm>
+          <a:prstGeom prst="rect">
+            <a:avLst/>
+          </a:prstGeom>
+          <a:noFill/>
+        </p:spPr>
+        <p:txBody>
+          <a:bodyPr wrap="square" lIns="45720" rIns="45720" tIns="27432" bIns="27432" anchor="t">
+            <a:spAutoFit/>
+          </a:bodyPr>
+          <a:lstStyle/>
+          <a:p>
+            <a:pPr algn="ctr"/>
+            <a:r>
+              <a:rPr sz="1000" b="0" i="0">
+                <a:solidFill>
+                  <a:srgbClr val="6B7A72"/>
+                </a:solidFill>
+                <a:latin typeface="Calibri"/>
+              </a:rPr>
+              <a:t>Basado en el modelo de Ned Herrmann</a:t>
+            </a:r>
+          </a:p>
+        </p:txBody>
+      </p:sp>
     </p:spTree>
   </p:cSld>
   <p:clrMapOvr>
@@ -10542,7 +12628,7 @@
                 </a:solidFill>
                 <a:latin typeface="Calibri"/>
               </a:rPr>
-              <a:t>DISEÑO</a:t>
+              <a:t>MARCO CONCEPTUAL</a:t>
             </a:r>
           </a:p>
         </p:txBody>
@@ -10577,7 +12663,7 @@
                 </a:solidFill>
                 <a:latin typeface="Calibri"/>
               </a:rPr>
-              <a:t>Qué implica para el diseño del programa</a:t>
+              <a:t>Modelo de cerebro integral: cuatro formas de pensar</a:t>
             </a:r>
           </a:p>
         </p:txBody>
@@ -10654,20 +12740,23 @@
       </p:sp>
       <p:sp>
         <p:nvSpPr>
-          <p:cNvPr id="7" name="Oval 6"/>
+          <p:cNvPr id="7" name="Pie 6"/>
           <p:cNvSpPr/>
           <p:nvPr/>
         </p:nvSpPr>
         <p:spPr>
           <a:xfrm>
-            <a:off x="731520" y="1783080"/>
-            <a:ext cx="457200" cy="457200"/>
-          </a:xfrm>
-          <a:prstGeom prst="ellipse">
-            <a:avLst/>
+            <a:off x="3895344" y="1728215"/>
+            <a:ext cx="4297680" cy="4297680"/>
+          </a:xfrm>
+          <a:prstGeom prst="pie">
+            <a:avLst>
+              <a:gd name="adj1" fmla="val 10800000"/>
+              <a:gd name="adj2" fmla="val 16200000"/>
+            </a:avLst>
           </a:prstGeom>
           <a:solidFill>
-            <a:srgbClr val="1F5C3A"/>
+            <a:srgbClr val="2F7DC1"/>
           </a:solidFill>
           <a:ln>
             <a:noFill/>
@@ -10689,108 +12778,103 @@
           </a:fontRef>
         </p:style>
         <p:txBody>
-          <a:bodyPr rtlCol="0" anchor="ctr" wrap="square" lIns="73152" rIns="73152"/>
-          <a:lstStyle/>
-          <a:p>
-            <a:pPr algn="ctr"/>
-            <a:r>
-              <a:rPr sz="1500" b="1">
+          <a:bodyPr rtlCol="0" anchor="ctr"/>
+          <a:lstStyle/>
+          <a:p>
+            <a:pPr algn="ctr"/>
+          </a:p>
+        </p:txBody>
+      </p:sp>
+      <p:sp>
+        <p:nvSpPr>
+          <p:cNvPr id="8" name="TextBox 7"/>
+          <p:cNvSpPr txBox="1"/>
+          <p:nvPr/>
+        </p:nvSpPr>
+        <p:spPr>
+          <a:xfrm>
+            <a:off x="4261104" y="2185416"/>
+            <a:ext cx="1600200" cy="1463040"/>
+          </a:xfrm>
+          <a:prstGeom prst="rect">
+            <a:avLst/>
+          </a:prstGeom>
+          <a:noFill/>
+        </p:spPr>
+        <p:txBody>
+          <a:bodyPr wrap="square" lIns="45720" rIns="45720" tIns="27432" bIns="27432" anchor="ctr">
+            <a:spAutoFit/>
+          </a:bodyPr>
+          <a:lstStyle/>
+          <a:p>
+            <a:pPr algn="r"/>
+            <a:r>
+              <a:rPr sz="1400" b="0" i="0">
                 <a:solidFill>
                   <a:srgbClr val="FFFFFF"/>
                 </a:solidFill>
                 <a:latin typeface="Calibri"/>
               </a:rPr>
-              <a:t>1</a:t>
-            </a:r>
-          </a:p>
-        </p:txBody>
-      </p:sp>
-      <p:sp>
-        <p:nvSpPr>
-          <p:cNvPr id="8" name="TextBox 7"/>
-          <p:cNvSpPr txBox="1"/>
-          <p:nvPr/>
-        </p:nvSpPr>
-        <p:spPr>
-          <a:xfrm>
-            <a:off x="1371600" y="1691640"/>
-            <a:ext cx="3291840" cy="640080"/>
-          </a:xfrm>
-          <a:prstGeom prst="rect">
-            <a:avLst/>
-          </a:prstGeom>
-          <a:noFill/>
-        </p:spPr>
-        <p:txBody>
-          <a:bodyPr wrap="square" lIns="45720" rIns="45720" tIns="27432" bIns="27432" anchor="ctr">
-            <a:spAutoFit/>
-          </a:bodyPr>
-          <a:lstStyle/>
-          <a:p>
-            <a:pPr algn="l"/>
-            <a:r>
-              <a:rPr sz="1800" b="1" i="0">
-                <a:solidFill>
-                  <a:srgbClr val="1E2A24"/>
-                </a:solidFill>
-                <a:latin typeface="Calibri"/>
-              </a:rPr>
-              <a:t>Casos reales</a:t>
-            </a:r>
-          </a:p>
-        </p:txBody>
-      </p:sp>
-      <p:sp>
-        <p:nvSpPr>
-          <p:cNvPr id="9" name="TextBox 8"/>
-          <p:cNvSpPr txBox="1"/>
-          <p:nvPr/>
-        </p:nvSpPr>
-        <p:spPr>
-          <a:xfrm>
-            <a:off x="4663440" y="1691640"/>
-            <a:ext cx="6858000" cy="640080"/>
-          </a:xfrm>
-          <a:prstGeom prst="rect">
-            <a:avLst/>
-          </a:prstGeom>
-          <a:noFill/>
-        </p:spPr>
-        <p:txBody>
-          <a:bodyPr wrap="square" lIns="45720" rIns="45720" tIns="27432" bIns="27432" anchor="ctr">
-            <a:spAutoFit/>
-          </a:bodyPr>
-          <a:lstStyle/>
-          <a:p>
-            <a:pPr algn="l"/>
-            <a:r>
-              <a:rPr sz="1600" b="0" i="0">
-                <a:solidFill>
-                  <a:srgbClr val="6B7A72"/>
-                </a:solidFill>
-                <a:latin typeface="Calibri"/>
-              </a:rPr>
-              <a:t>Trabajar situaciones concretas de COTAGRO, no teoría genérica.</a:t>
-            </a:r>
-          </a:p>
-        </p:txBody>
-      </p:sp>
-      <p:sp>
-        <p:nvSpPr>
-          <p:cNvPr id="10" name="Oval 9"/>
+              <a:t>Lógico</a:t>
+            </a:r>
+          </a:p>
+          <a:p>
+            <a:pPr algn="r"/>
+            <a:r>
+              <a:rPr sz="1400" b="0" i="0">
+                <a:solidFill>
+                  <a:srgbClr val="FFFFFF"/>
+                </a:solidFill>
+                <a:latin typeface="Calibri"/>
+              </a:rPr>
+              <a:t>Analítico</a:t>
+            </a:r>
+          </a:p>
+          <a:p>
+            <a:pPr algn="r"/>
+            <a:r>
+              <a:rPr sz="1400" b="0" i="0">
+                <a:solidFill>
+                  <a:srgbClr val="FFFFFF"/>
+                </a:solidFill>
+                <a:latin typeface="Calibri"/>
+              </a:rPr>
+              <a:t>Basado en hechos</a:t>
+            </a:r>
+          </a:p>
+          <a:p>
+            <a:pPr algn="r"/>
+            <a:r>
+              <a:rPr sz="1400" b="0" i="0">
+                <a:solidFill>
+                  <a:srgbClr val="FFFFFF"/>
+                </a:solidFill>
+                <a:latin typeface="Calibri"/>
+              </a:rPr>
+              <a:t>Cuantitativo</a:t>
+            </a:r>
+          </a:p>
+        </p:txBody>
+      </p:sp>
+      <p:sp>
+        <p:nvSpPr>
+          <p:cNvPr id="9" name="Pie 8"/>
           <p:cNvSpPr/>
           <p:nvPr/>
         </p:nvSpPr>
         <p:spPr>
           <a:xfrm>
-            <a:off x="731520" y="2697480"/>
-            <a:ext cx="457200" cy="457200"/>
-          </a:xfrm>
-          <a:prstGeom prst="ellipse">
-            <a:avLst/>
+            <a:off x="4005072" y="1728215"/>
+            <a:ext cx="4297680" cy="4297680"/>
+          </a:xfrm>
+          <a:prstGeom prst="pie">
+            <a:avLst>
+              <a:gd name="adj1" fmla="val 16200000"/>
+              <a:gd name="adj2" fmla="val 0"/>
+            </a:avLst>
           </a:prstGeom>
           <a:solidFill>
-            <a:srgbClr val="1F5C3A"/>
+            <a:srgbClr val="EDB81D"/>
           </a:solidFill>
           <a:ln>
             <a:noFill/>
@@ -10812,32 +12896,23 @@
           </a:fontRef>
         </p:style>
         <p:txBody>
-          <a:bodyPr rtlCol="0" anchor="ctr" wrap="square" lIns="73152" rIns="73152"/>
-          <a:lstStyle/>
-          <a:p>
-            <a:pPr algn="ctr"/>
-            <a:r>
-              <a:rPr sz="1500" b="1">
-                <a:solidFill>
-                  <a:srgbClr val="FFFFFF"/>
-                </a:solidFill>
-                <a:latin typeface="Calibri"/>
-              </a:rPr>
-              <a:t>2</a:t>
-            </a:r>
-          </a:p>
-        </p:txBody>
-      </p:sp>
-      <p:sp>
-        <p:nvSpPr>
-          <p:cNvPr id="11" name="TextBox 10"/>
-          <p:cNvSpPr txBox="1"/>
-          <p:nvPr/>
-        </p:nvSpPr>
-        <p:spPr>
-          <a:xfrm>
-            <a:off x="1371600" y="2606040"/>
-            <a:ext cx="3291840" cy="640080"/>
+          <a:bodyPr rtlCol="0" anchor="ctr"/>
+          <a:lstStyle/>
+          <a:p>
+            <a:pPr algn="ctr"/>
+          </a:p>
+        </p:txBody>
+      </p:sp>
+      <p:sp>
+        <p:nvSpPr>
+          <p:cNvPr id="10" name="TextBox 9"/>
+          <p:cNvSpPr txBox="1"/>
+          <p:nvPr/>
+        </p:nvSpPr>
+        <p:spPr>
+          <a:xfrm>
+            <a:off x="6336792" y="2185416"/>
+            <a:ext cx="1600200" cy="1463040"/>
           </a:xfrm>
           <a:prstGeom prst="rect">
             <a:avLst/>
@@ -10852,68 +12927,72 @@
           <a:p>
             <a:pPr algn="l"/>
             <a:r>
-              <a:rPr sz="1800" b="1" i="0">
+              <a:rPr sz="1400" b="0" i="0">
                 <a:solidFill>
                   <a:srgbClr val="1E2A24"/>
                 </a:solidFill>
                 <a:latin typeface="Calibri"/>
               </a:rPr>
-              <a:t>Referentes como mentores</a:t>
-            </a:r>
-          </a:p>
-        </p:txBody>
-      </p:sp>
-      <p:sp>
-        <p:nvSpPr>
-          <p:cNvPr id="12" name="TextBox 11"/>
-          <p:cNvSpPr txBox="1"/>
-          <p:nvPr/>
-        </p:nvSpPr>
-        <p:spPr>
-          <a:xfrm>
-            <a:off x="4663440" y="2606040"/>
-            <a:ext cx="6858000" cy="640080"/>
-          </a:xfrm>
-          <a:prstGeom prst="rect">
-            <a:avLst/>
-          </a:prstGeom>
-          <a:noFill/>
-        </p:spPr>
-        <p:txBody>
-          <a:bodyPr wrap="square" lIns="45720" rIns="45720" tIns="27432" bIns="27432" anchor="ctr">
-            <a:spAutoFit/>
-          </a:bodyPr>
-          <a:lstStyle/>
+              <a:t>Holístico</a:t>
+            </a:r>
+          </a:p>
           <a:p>
             <a:pPr algn="l"/>
             <a:r>
-              <a:rPr sz="1600" b="0" i="0">
-                <a:solidFill>
-                  <a:srgbClr val="6B7A72"/>
-                </a:solidFill>
-                <a:latin typeface="Calibri"/>
-              </a:rPr>
-              <a:t>Magallanes, Nicolino, Moressi y Nasi (Comunicación) cuentan casos y co-facilitan.</a:t>
-            </a:r>
-          </a:p>
-        </p:txBody>
-      </p:sp>
-      <p:sp>
-        <p:nvSpPr>
-          <p:cNvPr id="13" name="Oval 12"/>
+              <a:rPr sz="1400" b="0" i="0">
+                <a:solidFill>
+                  <a:srgbClr val="1E2A24"/>
+                </a:solidFill>
+                <a:latin typeface="Calibri"/>
+              </a:rPr>
+              <a:t>Intuitivo</a:t>
+            </a:r>
+          </a:p>
+          <a:p>
+            <a:pPr algn="l"/>
+            <a:r>
+              <a:rPr sz="1400" b="0" i="0">
+                <a:solidFill>
+                  <a:srgbClr val="1E2A24"/>
+                </a:solidFill>
+                <a:latin typeface="Calibri"/>
+              </a:rPr>
+              <a:t>Integrador</a:t>
+            </a:r>
+          </a:p>
+          <a:p>
+            <a:pPr algn="l"/>
+            <a:r>
+              <a:rPr sz="1400" b="0" i="0">
+                <a:solidFill>
+                  <a:srgbClr val="1E2A24"/>
+                </a:solidFill>
+                <a:latin typeface="Calibri"/>
+              </a:rPr>
+              <a:t>Sintetizador</a:t>
+            </a:r>
+          </a:p>
+        </p:txBody>
+      </p:sp>
+      <p:sp>
+        <p:nvSpPr>
+          <p:cNvPr id="11" name="Pie 10"/>
           <p:cNvSpPr/>
           <p:nvPr/>
         </p:nvSpPr>
         <p:spPr>
           <a:xfrm>
-            <a:off x="731520" y="3611880"/>
-            <a:ext cx="457200" cy="457200"/>
-          </a:xfrm>
-          <a:prstGeom prst="ellipse">
-            <a:avLst/>
+            <a:off x="4005072" y="1837943"/>
+            <a:ext cx="4297680" cy="4297680"/>
+          </a:xfrm>
+          <a:prstGeom prst="pie">
+            <a:avLst>
+              <a:gd name="adj1" fmla="val 0"/>
+              <a:gd name="adj2" fmla="val 5400000"/>
+            </a:avLst>
           </a:prstGeom>
           <a:solidFill>
-            <a:srgbClr val="1F5C3A"/>
+            <a:srgbClr val="C8352F"/>
           </a:solidFill>
           <a:ln>
             <a:noFill/>
@@ -10935,108 +13014,103 @@
           </a:fontRef>
         </p:style>
         <p:txBody>
-          <a:bodyPr rtlCol="0" anchor="ctr" wrap="square" lIns="73152" rIns="73152"/>
-          <a:lstStyle/>
-          <a:p>
-            <a:pPr algn="ctr"/>
-            <a:r>
-              <a:rPr sz="1500" b="1">
+          <a:bodyPr rtlCol="0" anchor="ctr"/>
+          <a:lstStyle/>
+          <a:p>
+            <a:pPr algn="ctr"/>
+          </a:p>
+        </p:txBody>
+      </p:sp>
+      <p:sp>
+        <p:nvSpPr>
+          <p:cNvPr id="12" name="TextBox 11"/>
+          <p:cNvSpPr txBox="1"/>
+          <p:nvPr/>
+        </p:nvSpPr>
+        <p:spPr>
+          <a:xfrm>
+            <a:off x="6336792" y="4215383"/>
+            <a:ext cx="1600200" cy="1463040"/>
+          </a:xfrm>
+          <a:prstGeom prst="rect">
+            <a:avLst/>
+          </a:prstGeom>
+          <a:noFill/>
+        </p:spPr>
+        <p:txBody>
+          <a:bodyPr wrap="square" lIns="45720" rIns="45720" tIns="27432" bIns="27432" anchor="ctr">
+            <a:spAutoFit/>
+          </a:bodyPr>
+          <a:lstStyle/>
+          <a:p>
+            <a:pPr algn="l"/>
+            <a:r>
+              <a:rPr sz="1400" b="0" i="0">
                 <a:solidFill>
                   <a:srgbClr val="FFFFFF"/>
                 </a:solidFill>
                 <a:latin typeface="Calibri"/>
               </a:rPr>
-              <a:t>3</a:t>
-            </a:r>
-          </a:p>
-        </p:txBody>
-      </p:sp>
-      <p:sp>
-        <p:nvSpPr>
-          <p:cNvPr id="14" name="TextBox 13"/>
-          <p:cNvSpPr txBox="1"/>
-          <p:nvPr/>
-        </p:nvSpPr>
-        <p:spPr>
-          <a:xfrm>
-            <a:off x="1371600" y="3520440"/>
-            <a:ext cx="3291840" cy="640080"/>
-          </a:xfrm>
-          <a:prstGeom prst="rect">
-            <a:avLst/>
-          </a:prstGeom>
-          <a:noFill/>
-        </p:spPr>
-        <p:txBody>
-          <a:bodyPr wrap="square" lIns="45720" rIns="45720" tIns="27432" bIns="27432" anchor="ctr">
-            <a:spAutoFit/>
-          </a:bodyPr>
-          <a:lstStyle/>
+              <a:t>Interpersonal</a:t>
+            </a:r>
+          </a:p>
           <a:p>
             <a:pPr algn="l"/>
             <a:r>
-              <a:rPr sz="1800" b="1" i="0">
-                <a:solidFill>
-                  <a:srgbClr val="1E2A24"/>
-                </a:solidFill>
-                <a:latin typeface="Calibri"/>
-              </a:rPr>
-              <a:t>Mezclar gerencias</a:t>
-            </a:r>
-          </a:p>
-        </p:txBody>
-      </p:sp>
-      <p:sp>
-        <p:nvSpPr>
-          <p:cNvPr id="15" name="TextBox 14"/>
-          <p:cNvSpPr txBox="1"/>
-          <p:nvPr/>
-        </p:nvSpPr>
-        <p:spPr>
-          <a:xfrm>
-            <a:off x="4663440" y="3520440"/>
-            <a:ext cx="6858000" cy="640080"/>
-          </a:xfrm>
-          <a:prstGeom prst="rect">
-            <a:avLst/>
-          </a:prstGeom>
-          <a:noFill/>
-        </p:spPr>
-        <p:txBody>
-          <a:bodyPr wrap="square" lIns="45720" rIns="45720" tIns="27432" bIns="27432" anchor="ctr">
-            <a:spAutoFit/>
-          </a:bodyPr>
-          <a:lstStyle/>
+              <a:rPr sz="1400" b="0" i="0">
+                <a:solidFill>
+                  <a:srgbClr val="FFFFFF"/>
+                </a:solidFill>
+                <a:latin typeface="Calibri"/>
+              </a:rPr>
+              <a:t>Basado en sentimientos</a:t>
+            </a:r>
+          </a:p>
           <a:p>
             <a:pPr algn="l"/>
             <a:r>
-              <a:rPr sz="1600" b="0" i="0">
-                <a:solidFill>
-                  <a:srgbClr val="6B7A72"/>
-                </a:solidFill>
-                <a:latin typeface="Calibri"/>
-              </a:rPr>
-              <a:t>Subgrupos cruzados para mejorar la comunicación entre áreas.</a:t>
-            </a:r>
-          </a:p>
-        </p:txBody>
-      </p:sp>
-      <p:sp>
-        <p:nvSpPr>
-          <p:cNvPr id="16" name="Oval 15"/>
+              <a:rPr sz="1400" b="0" i="0">
+                <a:solidFill>
+                  <a:srgbClr val="FFFFFF"/>
+                </a:solidFill>
+                <a:latin typeface="Calibri"/>
+              </a:rPr>
+              <a:t>Cinestésico</a:t>
+            </a:r>
+          </a:p>
+          <a:p>
+            <a:pPr algn="l"/>
+            <a:r>
+              <a:rPr sz="1400" b="0" i="0">
+                <a:solidFill>
+                  <a:srgbClr val="FFFFFF"/>
+                </a:solidFill>
+                <a:latin typeface="Calibri"/>
+              </a:rPr>
+              <a:t>Emocional</a:t>
+            </a:r>
+          </a:p>
+        </p:txBody>
+      </p:sp>
+      <p:sp>
+        <p:nvSpPr>
+          <p:cNvPr id="13" name="Pie 12"/>
           <p:cNvSpPr/>
           <p:nvPr/>
         </p:nvSpPr>
         <p:spPr>
           <a:xfrm>
-            <a:off x="731520" y="4526279"/>
-            <a:ext cx="457200" cy="457200"/>
-          </a:xfrm>
-          <a:prstGeom prst="ellipse">
-            <a:avLst/>
+            <a:off x="3895344" y="1837943"/>
+            <a:ext cx="4297680" cy="4297680"/>
+          </a:xfrm>
+          <a:prstGeom prst="pie">
+            <a:avLst>
+              <a:gd name="adj1" fmla="val 5400000"/>
+              <a:gd name="adj2" fmla="val 10800000"/>
+            </a:avLst>
           </a:prstGeom>
           <a:solidFill>
-            <a:srgbClr val="1F5C3A"/>
+            <a:srgbClr val="2E8B57"/>
           </a:solidFill>
           <a:ln>
             <a:noFill/>
@@ -11058,18 +13132,150 @@
           </a:fontRef>
         </p:style>
         <p:txBody>
-          <a:bodyPr rtlCol="0" anchor="ctr" wrap="square" lIns="73152" rIns="73152"/>
-          <a:lstStyle/>
-          <a:p>
-            <a:pPr algn="ctr"/>
-            <a:r>
-              <a:rPr sz="1500" b="1">
+          <a:bodyPr rtlCol="0" anchor="ctr"/>
+          <a:lstStyle/>
+          <a:p>
+            <a:pPr algn="ctr"/>
+          </a:p>
+        </p:txBody>
+      </p:sp>
+      <p:sp>
+        <p:nvSpPr>
+          <p:cNvPr id="14" name="TextBox 13"/>
+          <p:cNvSpPr txBox="1"/>
+          <p:nvPr/>
+        </p:nvSpPr>
+        <p:spPr>
+          <a:xfrm>
+            <a:off x="4261104" y="4215383"/>
+            <a:ext cx="1600200" cy="1463040"/>
+          </a:xfrm>
+          <a:prstGeom prst="rect">
+            <a:avLst/>
+          </a:prstGeom>
+          <a:noFill/>
+        </p:spPr>
+        <p:txBody>
+          <a:bodyPr wrap="square" lIns="45720" rIns="45720" tIns="27432" bIns="27432" anchor="ctr">
+            <a:spAutoFit/>
+          </a:bodyPr>
+          <a:lstStyle/>
+          <a:p>
+            <a:pPr algn="r"/>
+            <a:r>
+              <a:rPr sz="1400" b="0" i="0">
                 <a:solidFill>
                   <a:srgbClr val="FFFFFF"/>
                 </a:solidFill>
                 <a:latin typeface="Calibri"/>
               </a:rPr>
-              <a:t>4</a:t>
+              <a:t>Organizado</a:t>
+            </a:r>
+          </a:p>
+          <a:p>
+            <a:pPr algn="r"/>
+            <a:r>
+              <a:rPr sz="1400" b="0" i="0">
+                <a:solidFill>
+                  <a:srgbClr val="FFFFFF"/>
+                </a:solidFill>
+                <a:latin typeface="Calibri"/>
+              </a:rPr>
+              <a:t>Secuencial</a:t>
+            </a:r>
+          </a:p>
+          <a:p>
+            <a:pPr algn="r"/>
+            <a:r>
+              <a:rPr sz="1400" b="0" i="0">
+                <a:solidFill>
+                  <a:srgbClr val="FFFFFF"/>
+                </a:solidFill>
+                <a:latin typeface="Calibri"/>
+              </a:rPr>
+              <a:t>Planeador</a:t>
+            </a:r>
+          </a:p>
+          <a:p>
+            <a:pPr algn="r"/>
+            <a:r>
+              <a:rPr sz="1400" b="0" i="0">
+                <a:solidFill>
+                  <a:srgbClr val="FFFFFF"/>
+                </a:solidFill>
+                <a:latin typeface="Calibri"/>
+              </a:rPr>
+              <a:t>Detallado</a:t>
+            </a:r>
+          </a:p>
+        </p:txBody>
+      </p:sp>
+      <p:sp>
+        <p:nvSpPr>
+          <p:cNvPr id="15" name="TextBox 14"/>
+          <p:cNvSpPr txBox="1"/>
+          <p:nvPr/>
+        </p:nvSpPr>
+        <p:spPr>
+          <a:xfrm>
+            <a:off x="731520" y="1600200"/>
+            <a:ext cx="2743200" cy="731520"/>
+          </a:xfrm>
+          <a:prstGeom prst="rect">
+            <a:avLst/>
+          </a:prstGeom>
+          <a:noFill/>
+        </p:spPr>
+        <p:txBody>
+          <a:bodyPr wrap="square" lIns="45720" rIns="45720" tIns="27432" bIns="27432" anchor="t">
+            <a:spAutoFit/>
+          </a:bodyPr>
+          <a:lstStyle/>
+          <a:p>
+            <a:pPr algn="l"/>
+            <a:r>
+              <a:rPr sz="4000" b="1" i="0">
+                <a:solidFill>
+                  <a:srgbClr val="2F7DC1"/>
+                </a:solidFill>
+                <a:latin typeface="Calibri"/>
+              </a:rPr>
+              <a:t>A</a:t>
+            </a:r>
+          </a:p>
+        </p:txBody>
+      </p:sp>
+      <p:sp>
+        <p:nvSpPr>
+          <p:cNvPr id="16" name="TextBox 15"/>
+          <p:cNvSpPr txBox="1"/>
+          <p:nvPr/>
+        </p:nvSpPr>
+        <p:spPr>
+          <a:xfrm>
+            <a:off x="731520" y="2286000"/>
+            <a:ext cx="2743200" cy="320040"/>
+          </a:xfrm>
+          <a:prstGeom prst="rect">
+            <a:avLst/>
+          </a:prstGeom>
+          <a:noFill/>
+        </p:spPr>
+        <p:txBody>
+          <a:bodyPr wrap="square" lIns="45720" rIns="45720" tIns="27432" bIns="27432" anchor="t">
+            <a:spAutoFit/>
+          </a:bodyPr>
+          <a:lstStyle/>
+          <a:p>
+            <a:pPr algn="l"/>
+            <a:r>
+              <a:rPr sz="1400" b="1" i="0">
+                <a:solidFill>
+                  <a:srgbClr val="1E2A24"/>
+                </a:solidFill>
+                <a:latin typeface="Calibri"/>
+              </a:rPr>
+              <a:t>Superior izquierdo</a:t>
             </a:r>
           </a:p>
         </p:txBody>
@@ -11082,187 +13288,499 @@
         </p:nvSpPr>
         <p:spPr>
           <a:xfrm>
-            <a:off x="1371600" y="4434840"/>
-            <a:ext cx="3291840" cy="640080"/>
-          </a:xfrm>
-          <a:prstGeom prst="rect">
-            <a:avLst/>
-          </a:prstGeom>
-          <a:noFill/>
-        </p:spPr>
-        <p:txBody>
-          <a:bodyPr wrap="square" lIns="45720" rIns="45720" tIns="27432" bIns="27432" anchor="ctr">
+            <a:off x="731520" y="2606040"/>
+            <a:ext cx="2743200" cy="1280160"/>
+          </a:xfrm>
+          <a:prstGeom prst="rect">
+            <a:avLst/>
+          </a:prstGeom>
+          <a:noFill/>
+        </p:spPr>
+        <p:txBody>
+          <a:bodyPr wrap="square" lIns="45720" rIns="45720" tIns="27432" bIns="27432" anchor="t">
+            <a:spAutoFit/>
+          </a:bodyPr>
+          <a:lstStyle/>
+          <a:p/>
+        </p:txBody>
+      </p:sp>
+      <p:sp>
+        <p:nvSpPr>
+          <p:cNvPr id="18" name="TextBox 17"/>
+          <p:cNvSpPr txBox="1"/>
+          <p:nvPr/>
+        </p:nvSpPr>
+        <p:spPr>
+          <a:xfrm>
+            <a:off x="8686800" y="1600200"/>
+            <a:ext cx="2743200" cy="731520"/>
+          </a:xfrm>
+          <a:prstGeom prst="rect">
+            <a:avLst/>
+          </a:prstGeom>
+          <a:noFill/>
+        </p:spPr>
+        <p:txBody>
+          <a:bodyPr wrap="square" lIns="45720" rIns="45720" tIns="27432" bIns="27432" anchor="t">
+            <a:spAutoFit/>
+          </a:bodyPr>
+          <a:lstStyle/>
+          <a:p>
+            <a:pPr algn="r"/>
+            <a:r>
+              <a:rPr sz="4000" b="1" i="0">
+                <a:solidFill>
+                  <a:srgbClr val="EDB81D"/>
+                </a:solidFill>
+                <a:latin typeface="Calibri"/>
+              </a:rPr>
+              <a:t>D</a:t>
+            </a:r>
+          </a:p>
+        </p:txBody>
+      </p:sp>
+      <p:sp>
+        <p:nvSpPr>
+          <p:cNvPr id="19" name="TextBox 18"/>
+          <p:cNvSpPr txBox="1"/>
+          <p:nvPr/>
+        </p:nvSpPr>
+        <p:spPr>
+          <a:xfrm>
+            <a:off x="8686800" y="2286000"/>
+            <a:ext cx="2743200" cy="320040"/>
+          </a:xfrm>
+          <a:prstGeom prst="rect">
+            <a:avLst/>
+          </a:prstGeom>
+          <a:noFill/>
+        </p:spPr>
+        <p:txBody>
+          <a:bodyPr wrap="square" lIns="45720" rIns="45720" tIns="27432" bIns="27432" anchor="t">
+            <a:spAutoFit/>
+          </a:bodyPr>
+          <a:lstStyle/>
+          <a:p>
+            <a:pPr algn="r"/>
+            <a:r>
+              <a:rPr sz="1400" b="1" i="0">
+                <a:solidFill>
+                  <a:srgbClr val="1E2A24"/>
+                </a:solidFill>
+                <a:latin typeface="Calibri"/>
+              </a:rPr>
+              <a:t>Superior derecho</a:t>
+            </a:r>
+          </a:p>
+        </p:txBody>
+      </p:sp>
+      <p:sp>
+        <p:nvSpPr>
+          <p:cNvPr id="20" name="TextBox 19"/>
+          <p:cNvSpPr txBox="1"/>
+          <p:nvPr/>
+        </p:nvSpPr>
+        <p:spPr>
+          <a:xfrm>
+            <a:off x="8686800" y="2606040"/>
+            <a:ext cx="2743200" cy="1280160"/>
+          </a:xfrm>
+          <a:prstGeom prst="rect">
+            <a:avLst/>
+          </a:prstGeom>
+          <a:noFill/>
+        </p:spPr>
+        <p:txBody>
+          <a:bodyPr wrap="square" lIns="45720" rIns="45720" tIns="27432" bIns="27432" anchor="t">
+            <a:spAutoFit/>
+          </a:bodyPr>
+          <a:lstStyle/>
+          <a:p/>
+        </p:txBody>
+      </p:sp>
+      <p:sp>
+        <p:nvSpPr>
+          <p:cNvPr id="21" name="TextBox 20"/>
+          <p:cNvSpPr txBox="1"/>
+          <p:nvPr/>
+        </p:nvSpPr>
+        <p:spPr>
+          <a:xfrm>
+            <a:off x="731520" y="4572000"/>
+            <a:ext cx="2743200" cy="731520"/>
+          </a:xfrm>
+          <a:prstGeom prst="rect">
+            <a:avLst/>
+          </a:prstGeom>
+          <a:noFill/>
+        </p:spPr>
+        <p:txBody>
+          <a:bodyPr wrap="square" lIns="45720" rIns="45720" tIns="27432" bIns="27432" anchor="t">
             <a:spAutoFit/>
           </a:bodyPr>
           <a:lstStyle/>
           <a:p>
             <a:pPr algn="l"/>
             <a:r>
-              <a:rPr sz="1800" b="1" i="0">
+              <a:rPr sz="4000" b="1" i="0">
+                <a:solidFill>
+                  <a:srgbClr val="2E8B57"/>
+                </a:solidFill>
+                <a:latin typeface="Calibri"/>
+              </a:rPr>
+              <a:t>B</a:t>
+            </a:r>
+          </a:p>
+        </p:txBody>
+      </p:sp>
+      <p:sp>
+        <p:nvSpPr>
+          <p:cNvPr id="22" name="TextBox 21"/>
+          <p:cNvSpPr txBox="1"/>
+          <p:nvPr/>
+        </p:nvSpPr>
+        <p:spPr>
+          <a:xfrm>
+            <a:off x="731520" y="5257800"/>
+            <a:ext cx="2743200" cy="320040"/>
+          </a:xfrm>
+          <a:prstGeom prst="rect">
+            <a:avLst/>
+          </a:prstGeom>
+          <a:noFill/>
+        </p:spPr>
+        <p:txBody>
+          <a:bodyPr wrap="square" lIns="45720" rIns="45720" tIns="27432" bIns="27432" anchor="t">
+            <a:spAutoFit/>
+          </a:bodyPr>
+          <a:lstStyle/>
+          <a:p>
+            <a:pPr algn="l"/>
+            <a:r>
+              <a:rPr sz="1400" b="1" i="0">
                 <a:solidFill>
                   <a:srgbClr val="1E2A24"/>
                 </a:solidFill>
                 <a:latin typeface="Calibri"/>
               </a:rPr>
-              <a:t>Práctica entre encuentros</a:t>
-            </a:r>
-          </a:p>
-        </p:txBody>
-      </p:sp>
-      <p:sp>
-        <p:nvSpPr>
-          <p:cNvPr id="18" name="TextBox 17"/>
-          <p:cNvSpPr txBox="1"/>
-          <p:nvPr/>
-        </p:nvSpPr>
-        <p:spPr>
-          <a:xfrm>
-            <a:off x="4663440" y="4434840"/>
-            <a:ext cx="6858000" cy="640080"/>
-          </a:xfrm>
-          <a:prstGeom prst="rect">
-            <a:avLst/>
-          </a:prstGeom>
-          <a:noFill/>
-        </p:spPr>
-        <p:txBody>
-          <a:bodyPr wrap="square" lIns="45720" rIns="45720" tIns="27432" bIns="27432" anchor="ctr">
+              <a:t>Inferior izquierdo</a:t>
+            </a:r>
+          </a:p>
+        </p:txBody>
+      </p:sp>
+      <p:sp>
+        <p:nvSpPr>
+          <p:cNvPr id="23" name="TextBox 22"/>
+          <p:cNvSpPr txBox="1"/>
+          <p:nvPr/>
+        </p:nvSpPr>
+        <p:spPr>
+          <a:xfrm>
+            <a:off x="731520" y="5577840"/>
+            <a:ext cx="2743200" cy="1280160"/>
+          </a:xfrm>
+          <a:prstGeom prst="rect">
+            <a:avLst/>
+          </a:prstGeom>
+          <a:noFill/>
+        </p:spPr>
+        <p:txBody>
+          <a:bodyPr wrap="square" lIns="45720" rIns="45720" tIns="27432" bIns="27432" anchor="t">
+            <a:spAutoFit/>
+          </a:bodyPr>
+          <a:lstStyle/>
+          <a:p/>
+        </p:txBody>
+      </p:sp>
+      <p:sp>
+        <p:nvSpPr>
+          <p:cNvPr id="24" name="TextBox 23"/>
+          <p:cNvSpPr txBox="1"/>
+          <p:nvPr/>
+        </p:nvSpPr>
+        <p:spPr>
+          <a:xfrm>
+            <a:off x="8686800" y="4572000"/>
+            <a:ext cx="2743200" cy="731520"/>
+          </a:xfrm>
+          <a:prstGeom prst="rect">
+            <a:avLst/>
+          </a:prstGeom>
+          <a:noFill/>
+        </p:spPr>
+        <p:txBody>
+          <a:bodyPr wrap="square" lIns="45720" rIns="45720" tIns="27432" bIns="27432" anchor="t">
+            <a:spAutoFit/>
+          </a:bodyPr>
+          <a:lstStyle/>
+          <a:p>
+            <a:pPr algn="r"/>
+            <a:r>
+              <a:rPr sz="4000" b="1" i="0">
+                <a:solidFill>
+                  <a:srgbClr val="C8352F"/>
+                </a:solidFill>
+                <a:latin typeface="Calibri"/>
+              </a:rPr>
+              <a:t>C</a:t>
+            </a:r>
+          </a:p>
+        </p:txBody>
+      </p:sp>
+      <p:sp>
+        <p:nvSpPr>
+          <p:cNvPr id="25" name="TextBox 24"/>
+          <p:cNvSpPr txBox="1"/>
+          <p:nvPr/>
+        </p:nvSpPr>
+        <p:spPr>
+          <a:xfrm>
+            <a:off x="8686800" y="5257800"/>
+            <a:ext cx="2743200" cy="320040"/>
+          </a:xfrm>
+          <a:prstGeom prst="rect">
+            <a:avLst/>
+          </a:prstGeom>
+          <a:noFill/>
+        </p:spPr>
+        <p:txBody>
+          <a:bodyPr wrap="square" lIns="45720" rIns="45720" tIns="27432" bIns="27432" anchor="t">
+            <a:spAutoFit/>
+          </a:bodyPr>
+          <a:lstStyle/>
+          <a:p>
+            <a:pPr algn="r"/>
+            <a:r>
+              <a:rPr sz="1400" b="1" i="0">
+                <a:solidFill>
+                  <a:srgbClr val="1E2A24"/>
+                </a:solidFill>
+                <a:latin typeface="Calibri"/>
+              </a:rPr>
+              <a:t>Inferior derecho</a:t>
+            </a:r>
+          </a:p>
+        </p:txBody>
+      </p:sp>
+      <p:sp>
+        <p:nvSpPr>
+          <p:cNvPr id="26" name="TextBox 25"/>
+          <p:cNvSpPr txBox="1"/>
+          <p:nvPr/>
+        </p:nvSpPr>
+        <p:spPr>
+          <a:xfrm>
+            <a:off x="8686800" y="5577840"/>
+            <a:ext cx="2743200" cy="1280160"/>
+          </a:xfrm>
+          <a:prstGeom prst="rect">
+            <a:avLst/>
+          </a:prstGeom>
+          <a:noFill/>
+        </p:spPr>
+        <p:txBody>
+          <a:bodyPr wrap="square" lIns="45720" rIns="45720" tIns="27432" bIns="27432" anchor="t">
+            <a:spAutoFit/>
+          </a:bodyPr>
+          <a:lstStyle/>
+          <a:p/>
+        </p:txBody>
+      </p:sp>
+      <p:sp>
+        <p:nvSpPr>
+          <p:cNvPr id="27" name="TextBox 26"/>
+          <p:cNvSpPr txBox="1"/>
+          <p:nvPr/>
+        </p:nvSpPr>
+        <p:spPr>
+          <a:xfrm>
+            <a:off x="731520" y="3657600"/>
+            <a:ext cx="2194560" cy="640080"/>
+          </a:xfrm>
+          <a:prstGeom prst="rect">
+            <a:avLst/>
+          </a:prstGeom>
+          <a:noFill/>
+        </p:spPr>
+        <p:txBody>
+          <a:bodyPr wrap="square" lIns="45720" rIns="45720" tIns="27432" bIns="27432" anchor="t">
             <a:spAutoFit/>
           </a:bodyPr>
           <a:lstStyle/>
           <a:p>
             <a:pPr algn="l"/>
             <a:r>
-              <a:rPr sz="1600" b="0" i="0">
+              <a:rPr sz="1300" b="1" i="0">
+                <a:solidFill>
+                  <a:srgbClr val="1F5C3A"/>
+                </a:solidFill>
+                <a:latin typeface="Calibri"/>
+              </a:rPr>
+              <a:t>Procesamiento</a:t>
+            </a:r>
+          </a:p>
+          <a:p>
+            <a:pPr algn="l"/>
+            <a:r>
+              <a:rPr sz="1300" b="1" i="0">
+                <a:solidFill>
+                  <a:srgbClr val="1F5C3A"/>
+                </a:solidFill>
+                <a:latin typeface="Calibri"/>
+              </a:rPr>
+              <a:t>izquierdo (A + B)</a:t>
+            </a:r>
+          </a:p>
+        </p:txBody>
+      </p:sp>
+      <p:sp>
+        <p:nvSpPr>
+          <p:cNvPr id="28" name="TextBox 27"/>
+          <p:cNvSpPr txBox="1"/>
+          <p:nvPr/>
+        </p:nvSpPr>
+        <p:spPr>
+          <a:xfrm>
+            <a:off x="9235440" y="3657600"/>
+            <a:ext cx="2194560" cy="640080"/>
+          </a:xfrm>
+          <a:prstGeom prst="rect">
+            <a:avLst/>
+          </a:prstGeom>
+          <a:noFill/>
+        </p:spPr>
+        <p:txBody>
+          <a:bodyPr wrap="square" lIns="45720" rIns="45720" tIns="27432" bIns="27432" anchor="t">
+            <a:spAutoFit/>
+          </a:bodyPr>
+          <a:lstStyle/>
+          <a:p>
+            <a:pPr algn="r"/>
+            <a:r>
+              <a:rPr sz="1300" b="1" i="0">
+                <a:solidFill>
+                  <a:srgbClr val="1F5C3A"/>
+                </a:solidFill>
+                <a:latin typeface="Calibri"/>
+              </a:rPr>
+              <a:t>Procesamiento</a:t>
+            </a:r>
+          </a:p>
+          <a:p>
+            <a:pPr algn="r"/>
+            <a:r>
+              <a:rPr sz="1300" b="1" i="0">
+                <a:solidFill>
+                  <a:srgbClr val="1F5C3A"/>
+                </a:solidFill>
+                <a:latin typeface="Calibri"/>
+              </a:rPr>
+              <a:t>derecho (C + D)</a:t>
+            </a:r>
+          </a:p>
+        </p:txBody>
+      </p:sp>
+      <p:sp>
+        <p:nvSpPr>
+          <p:cNvPr id="29" name="TextBox 28"/>
+          <p:cNvSpPr txBox="1"/>
+          <p:nvPr/>
+        </p:nvSpPr>
+        <p:spPr>
+          <a:xfrm>
+            <a:off x="4453128" y="1417320"/>
+            <a:ext cx="3291840" cy="365760"/>
+          </a:xfrm>
+          <a:prstGeom prst="rect">
+            <a:avLst/>
+          </a:prstGeom>
+          <a:noFill/>
+        </p:spPr>
+        <p:txBody>
+          <a:bodyPr wrap="square" lIns="45720" rIns="45720" tIns="27432" bIns="27432" anchor="t">
+            <a:spAutoFit/>
+          </a:bodyPr>
+          <a:lstStyle/>
+          <a:p>
+            <a:pPr algn="ctr"/>
+            <a:r>
+              <a:rPr sz="1400" b="1" i="0">
+                <a:solidFill>
+                  <a:srgbClr val="1F5C3A"/>
+                </a:solidFill>
+                <a:latin typeface="Calibri"/>
+              </a:rPr>
+              <a:t>Procesamiento cerebral (A + D)</a:t>
+            </a:r>
+          </a:p>
+        </p:txBody>
+      </p:sp>
+      <p:sp>
+        <p:nvSpPr>
+          <p:cNvPr id="30" name="TextBox 29"/>
+          <p:cNvSpPr txBox="1"/>
+          <p:nvPr/>
+        </p:nvSpPr>
+        <p:spPr>
+          <a:xfrm>
+            <a:off x="4453128" y="6108192"/>
+            <a:ext cx="3291840" cy="320040"/>
+          </a:xfrm>
+          <a:prstGeom prst="rect">
+            <a:avLst/>
+          </a:prstGeom>
+          <a:noFill/>
+        </p:spPr>
+        <p:txBody>
+          <a:bodyPr wrap="square" lIns="45720" rIns="45720" tIns="27432" bIns="27432" anchor="t">
+            <a:spAutoFit/>
+          </a:bodyPr>
+          <a:lstStyle/>
+          <a:p>
+            <a:pPr algn="ctr"/>
+            <a:r>
+              <a:rPr sz="1400" b="1" i="0">
+                <a:solidFill>
+                  <a:srgbClr val="1F5C3A"/>
+                </a:solidFill>
+                <a:latin typeface="Calibri"/>
+              </a:rPr>
+              <a:t>Procesamiento límbico (B + C)</a:t>
+            </a:r>
+          </a:p>
+        </p:txBody>
+      </p:sp>
+      <p:sp>
+        <p:nvSpPr>
+          <p:cNvPr id="31" name="TextBox 30"/>
+          <p:cNvSpPr txBox="1"/>
+          <p:nvPr/>
+        </p:nvSpPr>
+        <p:spPr>
+          <a:xfrm>
+            <a:off x="3291840" y="6400800"/>
+            <a:ext cx="5669280" cy="274320"/>
+          </a:xfrm>
+          <a:prstGeom prst="rect">
+            <a:avLst/>
+          </a:prstGeom>
+          <a:noFill/>
+        </p:spPr>
+        <p:txBody>
+          <a:bodyPr wrap="square" lIns="45720" rIns="45720" tIns="27432" bIns="27432" anchor="t">
+            <a:spAutoFit/>
+          </a:bodyPr>
+          <a:lstStyle/>
+          <a:p>
+            <a:pPr algn="ctr"/>
+            <a:r>
+              <a:rPr sz="1000" b="0" i="0">
                 <a:solidFill>
                   <a:srgbClr val="6B7A72"/>
                 </a:solidFill>
                 <a:latin typeface="Calibri"/>
               </a:rPr>
-              <a:t>Un reto corto por semana, aplicado al puesto.</a:t>
-            </a:r>
-          </a:p>
-        </p:txBody>
-      </p:sp>
-      <p:sp>
-        <p:nvSpPr>
-          <p:cNvPr id="19" name="Oval 18"/>
-          <p:cNvSpPr/>
-          <p:nvPr/>
-        </p:nvSpPr>
-        <p:spPr>
-          <a:xfrm>
-            <a:off x="731520" y="5440679"/>
-            <a:ext cx="457200" cy="457200"/>
-          </a:xfrm>
-          <a:prstGeom prst="ellipse">
-            <a:avLst/>
-          </a:prstGeom>
-          <a:solidFill>
-            <a:srgbClr val="1F5C3A"/>
-          </a:solidFill>
-          <a:ln>
-            <a:noFill/>
-          </a:ln>
-          <a:effectLst/>
-        </p:spPr>
-        <p:style>
-          <a:lnRef idx="1">
-            <a:schemeClr val="accent1"/>
-          </a:lnRef>
-          <a:fillRef idx="3">
-            <a:schemeClr val="accent1"/>
-          </a:fillRef>
-          <a:effectRef idx="2">
-            <a:schemeClr val="accent1"/>
-          </a:effectRef>
-          <a:fontRef idx="minor">
-            <a:schemeClr val="lt1"/>
-          </a:fontRef>
-        </p:style>
-        <p:txBody>
-          <a:bodyPr rtlCol="0" anchor="ctr" wrap="square" lIns="73152" rIns="73152"/>
-          <a:lstStyle/>
-          <a:p>
-            <a:pPr algn="ctr"/>
-            <a:r>
-              <a:rPr sz="1500" b="1">
-                <a:solidFill>
-                  <a:srgbClr val="FFFFFF"/>
-                </a:solidFill>
-                <a:latin typeface="Calibri"/>
-              </a:rPr>
-              <a:t>5</a:t>
-            </a:r>
-          </a:p>
-        </p:txBody>
-      </p:sp>
-      <p:sp>
-        <p:nvSpPr>
-          <p:cNvPr id="20" name="TextBox 19"/>
-          <p:cNvSpPr txBox="1"/>
-          <p:nvPr/>
-        </p:nvSpPr>
-        <p:spPr>
-          <a:xfrm>
-            <a:off x="1371600" y="5349240"/>
-            <a:ext cx="3291840" cy="640080"/>
-          </a:xfrm>
-          <a:prstGeom prst="rect">
-            <a:avLst/>
-          </a:prstGeom>
-          <a:noFill/>
-        </p:spPr>
-        <p:txBody>
-          <a:bodyPr wrap="square" lIns="45720" rIns="45720" tIns="27432" bIns="27432" anchor="ctr">
-            <a:spAutoFit/>
-          </a:bodyPr>
-          <a:lstStyle/>
-          <a:p>
-            <a:pPr algn="l"/>
-            <a:r>
-              <a:rPr sz="1800" b="1" i="0">
-                <a:solidFill>
-                  <a:srgbClr val="1E2A24"/>
-                </a:solidFill>
-                <a:latin typeface="Calibri"/>
-              </a:rPr>
-              <a:t>Lenguaje simple</a:t>
-            </a:r>
-          </a:p>
-        </p:txBody>
-      </p:sp>
-      <p:sp>
-        <p:nvSpPr>
-          <p:cNvPr id="21" name="TextBox 20"/>
-          <p:cNvSpPr txBox="1"/>
-          <p:nvPr/>
-        </p:nvSpPr>
-        <p:spPr>
-          <a:xfrm>
-            <a:off x="4663440" y="5349240"/>
-            <a:ext cx="6858000" cy="640080"/>
-          </a:xfrm>
-          <a:prstGeom prst="rect">
-            <a:avLst/>
-          </a:prstGeom>
-          <a:noFill/>
-        </p:spPr>
-        <p:txBody>
-          <a:bodyPr wrap="square" lIns="45720" rIns="45720" tIns="27432" bIns="27432" anchor="ctr">
-            <a:spAutoFit/>
-          </a:bodyPr>
-          <a:lstStyle/>
-          <a:p>
-            <a:pPr algn="l"/>
-            <a:r>
-              <a:rPr sz="1600" b="0" i="0">
-                <a:solidFill>
-                  <a:srgbClr val="6B7A72"/>
-                </a:solidFill>
-                <a:latin typeface="Calibri"/>
-              </a:rPr>
-              <a:t>Herramientas de una hoja, ejemplos de campo, planta y oficina.</a:t>
+              <a:t>Basado en el modelo de Ned Herrmann</a:t>
             </a:r>
           </a:p>
         </p:txBody>
@@ -11359,7 +13877,7 @@
                 </a:solidFill>
                 <a:latin typeface="Calibri"/>
               </a:rPr>
-              <a:t>SUBGRUPOS</a:t>
+              <a:t>MARCO CONCEPTUAL</a:t>
             </a:r>
           </a:p>
         </p:txBody>
@@ -11394,7 +13912,7 @@
                 </a:solidFill>
                 <a:latin typeface="Calibri"/>
               </a:rPr>
-              <a:t>Propuesta inicial de seis subgrupos</a:t>
+              <a:t>Puntajes del perfil por área de preferencia</a:t>
             </a:r>
           </a:p>
         </p:txBody>
@@ -11471,20 +13989,23 @@
       </p:sp>
       <p:sp>
         <p:nvSpPr>
-          <p:cNvPr id="7" name="Rounded Rectangle 6"/>
+          <p:cNvPr id="7" name="Pie 6"/>
           <p:cNvSpPr/>
           <p:nvPr/>
         </p:nvSpPr>
         <p:spPr>
           <a:xfrm>
-            <a:off x="640080" y="1554480"/>
-            <a:ext cx="3566160" cy="2103120"/>
-          </a:xfrm>
-          <a:prstGeom prst="roundRect">
-            <a:avLst/>
+            <a:off x="4087368" y="1965959"/>
+            <a:ext cx="4023360" cy="4023360"/>
+          </a:xfrm>
+          <a:prstGeom prst="pie">
+            <a:avLst>
+              <a:gd name="adj1" fmla="val 10800000"/>
+              <a:gd name="adj2" fmla="val 16200000"/>
+            </a:avLst>
           </a:prstGeom>
           <a:solidFill>
-            <a:srgbClr val="EAF2EC"/>
+            <a:srgbClr val="2F7DC1"/>
           </a:solidFill>
           <a:ln>
             <a:noFill/>
@@ -11515,138 +14036,23 @@
       </p:sp>
       <p:sp>
         <p:nvSpPr>
-          <p:cNvPr id="8" name="TextBox 7"/>
-          <p:cNvSpPr txBox="1"/>
-          <p:nvPr/>
-        </p:nvSpPr>
-        <p:spPr>
-          <a:xfrm>
-            <a:off x="777240" y="1627632"/>
-            <a:ext cx="3291840" cy="365760"/>
-          </a:xfrm>
-          <a:prstGeom prst="rect">
-            <a:avLst/>
-          </a:prstGeom>
-          <a:noFill/>
-        </p:spPr>
-        <p:txBody>
-          <a:bodyPr wrap="square" lIns="45720" rIns="45720" tIns="27432" bIns="27432" anchor="t">
-            <a:spAutoFit/>
-          </a:bodyPr>
-          <a:lstStyle/>
-          <a:p>
-            <a:pPr algn="l"/>
-            <a:r>
-              <a:rPr sz="1500" b="1" i="0">
-                <a:solidFill>
-                  <a:srgbClr val="1F5C3A"/>
-                </a:solidFill>
-                <a:latin typeface="Calibri"/>
-              </a:rPr>
-              <a:t>Grupo 1</a:t>
-            </a:r>
-          </a:p>
-        </p:txBody>
-      </p:sp>
-      <p:sp>
-        <p:nvSpPr>
-          <p:cNvPr id="9" name="TextBox 8"/>
-          <p:cNvSpPr txBox="1"/>
-          <p:nvPr/>
-        </p:nvSpPr>
-        <p:spPr>
-          <a:xfrm>
-            <a:off x="777240" y="2011680"/>
-            <a:ext cx="3337560" cy="1737360"/>
-          </a:xfrm>
-          <a:prstGeom prst="rect">
-            <a:avLst/>
-          </a:prstGeom>
-          <a:noFill/>
-        </p:spPr>
-        <p:txBody>
-          <a:bodyPr wrap="square" lIns="45720" rIns="45720" tIns="27432" bIns="27432" anchor="t">
-            <a:spAutoFit/>
-          </a:bodyPr>
-          <a:lstStyle/>
-          <a:p>
-            <a:pPr algn="l"/>
-            <a:r>
-              <a:rPr sz="1200" b="0" i="0">
-                <a:solidFill>
-                  <a:srgbClr val="1E2A24"/>
-                </a:solidFill>
-                <a:latin typeface="Calibri"/>
-              </a:rPr>
-              <a:t>Costamagna, Brian Nicolas · Agro</a:t>
-            </a:r>
-          </a:p>
-          <a:p>
-            <a:pPr algn="l"/>
-            <a:r>
-              <a:rPr sz="1200" b="0" i="0">
-                <a:solidFill>
-                  <a:srgbClr val="1E2A24"/>
-                </a:solidFill>
-                <a:latin typeface="Calibri"/>
-              </a:rPr>
-              <a:t>Lujan, Veronica Paola · Agro</a:t>
-            </a:r>
-          </a:p>
-          <a:p>
-            <a:pPr algn="l"/>
-            <a:r>
-              <a:rPr sz="1200" b="0" i="0">
-                <a:solidFill>
-                  <a:srgbClr val="1E2A24"/>
-                </a:solidFill>
-                <a:latin typeface="Calibri"/>
-              </a:rPr>
-              <a:t>Riberi, Esteban Miguel · Agro</a:t>
-            </a:r>
-          </a:p>
-          <a:p>
-            <a:pPr algn="l"/>
-            <a:r>
-              <a:rPr sz="1200" b="0" i="0">
-                <a:solidFill>
-                  <a:srgbClr val="1E2A24"/>
-                </a:solidFill>
-                <a:latin typeface="Calibri"/>
-              </a:rPr>
-              <a:t>Nicolino, Lucia Evelin · Agro</a:t>
-            </a:r>
-          </a:p>
-          <a:p>
-            <a:pPr algn="l"/>
-            <a:r>
-              <a:rPr sz="1200" b="0" i="0">
-                <a:solidFill>
-                  <a:srgbClr val="1E2A24"/>
-                </a:solidFill>
-                <a:latin typeface="Calibri"/>
-              </a:rPr>
-              <a:t>Nasi, Sara · Cultura Org.</a:t>
-            </a:r>
-          </a:p>
-        </p:txBody>
-      </p:sp>
-      <p:sp>
-        <p:nvSpPr>
-          <p:cNvPr id="10" name="Rounded Rectangle 9"/>
+          <p:cNvPr id="8" name="Pie 7"/>
           <p:cNvSpPr/>
           <p:nvPr/>
         </p:nvSpPr>
         <p:spPr>
           <a:xfrm>
-            <a:off x="4389120" y="1554480"/>
-            <a:ext cx="3566160" cy="2103120"/>
-          </a:xfrm>
-          <a:prstGeom prst="roundRect">
-            <a:avLst/>
+            <a:off x="4771339" y="2649931"/>
+            <a:ext cx="2655417" cy="2655417"/>
+          </a:xfrm>
+          <a:prstGeom prst="pie">
+            <a:avLst>
+              <a:gd name="adj1" fmla="val 10800000"/>
+              <a:gd name="adj2" fmla="val 16200000"/>
+            </a:avLst>
           </a:prstGeom>
           <a:solidFill>
-            <a:srgbClr val="EAF2EC"/>
+            <a:srgbClr val="77AAD6"/>
           </a:solidFill>
           <a:ln>
             <a:noFill/>
@@ -11677,138 +14083,23 @@
       </p:sp>
       <p:sp>
         <p:nvSpPr>
-          <p:cNvPr id="11" name="TextBox 10"/>
-          <p:cNvSpPr txBox="1"/>
-          <p:nvPr/>
-        </p:nvSpPr>
-        <p:spPr>
-          <a:xfrm>
-            <a:off x="4526280" y="1627632"/>
-            <a:ext cx="3291840" cy="365760"/>
-          </a:xfrm>
-          <a:prstGeom prst="rect">
-            <a:avLst/>
-          </a:prstGeom>
-          <a:noFill/>
-        </p:spPr>
-        <p:txBody>
-          <a:bodyPr wrap="square" lIns="45720" rIns="45720" tIns="27432" bIns="27432" anchor="t">
-            <a:spAutoFit/>
-          </a:bodyPr>
-          <a:lstStyle/>
-          <a:p>
-            <a:pPr algn="l"/>
-            <a:r>
-              <a:rPr sz="1500" b="1" i="0">
-                <a:solidFill>
-                  <a:srgbClr val="1F5C3A"/>
-                </a:solidFill>
-                <a:latin typeface="Calibri"/>
-              </a:rPr>
-              <a:t>Grupo 2</a:t>
-            </a:r>
-          </a:p>
-        </p:txBody>
-      </p:sp>
-      <p:sp>
-        <p:nvSpPr>
-          <p:cNvPr id="12" name="TextBox 11"/>
-          <p:cNvSpPr txBox="1"/>
-          <p:nvPr/>
-        </p:nvSpPr>
-        <p:spPr>
-          <a:xfrm>
-            <a:off x="4526280" y="2011680"/>
-            <a:ext cx="3337560" cy="1737360"/>
-          </a:xfrm>
-          <a:prstGeom prst="rect">
-            <a:avLst/>
-          </a:prstGeom>
-          <a:noFill/>
-        </p:spPr>
-        <p:txBody>
-          <a:bodyPr wrap="square" lIns="45720" rIns="45720" tIns="27432" bIns="27432" anchor="t">
-            <a:spAutoFit/>
-          </a:bodyPr>
-          <a:lstStyle/>
-          <a:p>
-            <a:pPr algn="l"/>
-            <a:r>
-              <a:rPr sz="1200" b="0" i="0">
-                <a:solidFill>
-                  <a:srgbClr val="1E2A24"/>
-                </a:solidFill>
-                <a:latin typeface="Calibri"/>
-              </a:rPr>
-              <a:t>Costamagna, Horacio Alberto · Agro</a:t>
-            </a:r>
-          </a:p>
-          <a:p>
-            <a:pPr algn="l"/>
-            <a:r>
-              <a:rPr sz="1200" b="0" i="0">
-                <a:solidFill>
-                  <a:srgbClr val="1E2A24"/>
-                </a:solidFill>
-                <a:latin typeface="Calibri"/>
-              </a:rPr>
-              <a:t>Caula, Sofia · Negocios Urbanos</a:t>
-            </a:r>
-          </a:p>
-          <a:p>
-            <a:pPr algn="l"/>
-            <a:r>
-              <a:rPr sz="1200" b="0" i="0">
-                <a:solidFill>
-                  <a:srgbClr val="1E2A24"/>
-                </a:solidFill>
-                <a:latin typeface="Calibri"/>
-              </a:rPr>
-              <a:t>Kretek, Juan Ignacio · Negocios Globales</a:t>
-            </a:r>
-          </a:p>
-          <a:p>
-            <a:pPr algn="l"/>
-            <a:r>
-              <a:rPr sz="1200" b="0" i="0">
-                <a:solidFill>
-                  <a:srgbClr val="1E2A24"/>
-                </a:solidFill>
-                <a:latin typeface="Calibri"/>
-              </a:rPr>
-              <a:t>Moressi, Gerardo · Agro</a:t>
-            </a:r>
-          </a:p>
-          <a:p>
-            <a:pPr algn="l"/>
-            <a:r>
-              <a:rPr sz="1200" b="0" i="0">
-                <a:solidFill>
-                  <a:srgbClr val="1E2A24"/>
-                </a:solidFill>
-                <a:latin typeface="Calibri"/>
-              </a:rPr>
-              <a:t>Kretek, Juan Pablo · IT y Admin.</a:t>
-            </a:r>
-          </a:p>
-        </p:txBody>
-      </p:sp>
-      <p:sp>
-        <p:nvSpPr>
-          <p:cNvPr id="13" name="Rounded Rectangle 12"/>
+          <p:cNvPr id="9" name="Pie 8"/>
           <p:cNvSpPr/>
           <p:nvPr/>
         </p:nvSpPr>
         <p:spPr>
           <a:xfrm>
-            <a:off x="8138159" y="1554480"/>
-            <a:ext cx="3566160" cy="2103120"/>
-          </a:xfrm>
-          <a:prstGeom prst="roundRect">
-            <a:avLst/>
+            <a:off x="5435193" y="3313785"/>
+            <a:ext cx="1327708" cy="1327708"/>
+          </a:xfrm>
+          <a:prstGeom prst="pie">
+            <a:avLst>
+              <a:gd name="adj1" fmla="val 10800000"/>
+              <a:gd name="adj2" fmla="val 16200000"/>
+            </a:avLst>
           </a:prstGeom>
           <a:solidFill>
-            <a:srgbClr val="EAF2EC"/>
+            <a:srgbClr val="B6D1E9"/>
           </a:solidFill>
           <a:ln>
             <a:noFill/>
@@ -11839,138 +14130,23 @@
       </p:sp>
       <p:sp>
         <p:nvSpPr>
-          <p:cNvPr id="14" name="TextBox 13"/>
-          <p:cNvSpPr txBox="1"/>
-          <p:nvPr/>
-        </p:nvSpPr>
-        <p:spPr>
-          <a:xfrm>
-            <a:off x="8275319" y="1627632"/>
-            <a:ext cx="3291840" cy="365760"/>
-          </a:xfrm>
-          <a:prstGeom prst="rect">
-            <a:avLst/>
-          </a:prstGeom>
-          <a:noFill/>
-        </p:spPr>
-        <p:txBody>
-          <a:bodyPr wrap="square" lIns="45720" rIns="45720" tIns="27432" bIns="27432" anchor="t">
-            <a:spAutoFit/>
-          </a:bodyPr>
-          <a:lstStyle/>
-          <a:p>
-            <a:pPr algn="l"/>
-            <a:r>
-              <a:rPr sz="1500" b="1" i="0">
-                <a:solidFill>
-                  <a:srgbClr val="1F5C3A"/>
-                </a:solidFill>
-                <a:latin typeface="Calibri"/>
-              </a:rPr>
-              <a:t>Grupo 3</a:t>
-            </a:r>
-          </a:p>
-        </p:txBody>
-      </p:sp>
-      <p:sp>
-        <p:nvSpPr>
-          <p:cNvPr id="15" name="TextBox 14"/>
-          <p:cNvSpPr txBox="1"/>
-          <p:nvPr/>
-        </p:nvSpPr>
-        <p:spPr>
-          <a:xfrm>
-            <a:off x="8275319" y="2011680"/>
-            <a:ext cx="3337560" cy="1737360"/>
-          </a:xfrm>
-          <a:prstGeom prst="rect">
-            <a:avLst/>
-          </a:prstGeom>
-          <a:noFill/>
-        </p:spPr>
-        <p:txBody>
-          <a:bodyPr wrap="square" lIns="45720" rIns="45720" tIns="27432" bIns="27432" anchor="t">
-            <a:spAutoFit/>
-          </a:bodyPr>
-          <a:lstStyle/>
-          <a:p>
-            <a:pPr algn="l"/>
-            <a:r>
-              <a:rPr sz="1200" b="0" i="0">
-                <a:solidFill>
-                  <a:srgbClr val="1E2A24"/>
-                </a:solidFill>
-                <a:latin typeface="Calibri"/>
-              </a:rPr>
-              <a:t>Filippini, Danilo · Agro</a:t>
-            </a:r>
-          </a:p>
-          <a:p>
-            <a:pPr algn="l"/>
-            <a:r>
-              <a:rPr sz="1200" b="0" i="0">
-                <a:solidFill>
-                  <a:srgbClr val="1E2A24"/>
-                </a:solidFill>
-                <a:latin typeface="Calibri"/>
-              </a:rPr>
-              <a:t>Carrera, Noelia Maria · Negocios Globales</a:t>
-            </a:r>
-          </a:p>
-          <a:p>
-            <a:pPr algn="l"/>
-            <a:r>
-              <a:rPr sz="1200" b="0" i="0">
-                <a:solidFill>
-                  <a:srgbClr val="1E2A24"/>
-                </a:solidFill>
-                <a:latin typeface="Calibri"/>
-              </a:rPr>
-              <a:t>Monti, Johana Eugenia · Negocios Globales</a:t>
-            </a:r>
-          </a:p>
-          <a:p>
-            <a:pPr algn="l"/>
-            <a:r>
-              <a:rPr sz="1200" b="0" i="0">
-                <a:solidFill>
-                  <a:srgbClr val="1E2A24"/>
-                </a:solidFill>
-                <a:latin typeface="Calibri"/>
-              </a:rPr>
-              <a:t>Magallanes, Juan Martin · Agro</a:t>
-            </a:r>
-          </a:p>
-          <a:p>
-            <a:pPr algn="l"/>
-            <a:r>
-              <a:rPr sz="1200" b="0" i="0">
-                <a:solidFill>
-                  <a:srgbClr val="1E2A24"/>
-                </a:solidFill>
-                <a:latin typeface="Calibri"/>
-              </a:rPr>
-              <a:t>Perticarari, Dante · Proteína Animal</a:t>
-            </a:r>
-          </a:p>
-        </p:txBody>
-      </p:sp>
-      <p:sp>
-        <p:nvSpPr>
-          <p:cNvPr id="16" name="Rounded Rectangle 15"/>
+          <p:cNvPr id="10" name="Pie 9"/>
           <p:cNvSpPr/>
           <p:nvPr/>
         </p:nvSpPr>
         <p:spPr>
           <a:xfrm>
-            <a:off x="640080" y="3840480"/>
-            <a:ext cx="3566160" cy="2103120"/>
-          </a:xfrm>
-          <a:prstGeom prst="roundRect">
-            <a:avLst/>
+            <a:off x="4087368" y="1965959"/>
+            <a:ext cx="4023360" cy="4023360"/>
+          </a:xfrm>
+          <a:prstGeom prst="pie">
+            <a:avLst>
+              <a:gd name="adj1" fmla="val 16200000"/>
+              <a:gd name="adj2" fmla="val 0"/>
+            </a:avLst>
           </a:prstGeom>
           <a:solidFill>
-            <a:srgbClr val="EAF2EC"/>
+            <a:srgbClr val="EDB81D"/>
           </a:solidFill>
           <a:ln>
             <a:noFill/>
@@ -12001,138 +14177,23 @@
       </p:sp>
       <p:sp>
         <p:nvSpPr>
-          <p:cNvPr id="17" name="TextBox 16"/>
-          <p:cNvSpPr txBox="1"/>
-          <p:nvPr/>
-        </p:nvSpPr>
-        <p:spPr>
-          <a:xfrm>
-            <a:off x="777240" y="3913632"/>
-            <a:ext cx="3291840" cy="365760"/>
-          </a:xfrm>
-          <a:prstGeom prst="rect">
-            <a:avLst/>
-          </a:prstGeom>
-          <a:noFill/>
-        </p:spPr>
-        <p:txBody>
-          <a:bodyPr wrap="square" lIns="45720" rIns="45720" tIns="27432" bIns="27432" anchor="t">
-            <a:spAutoFit/>
-          </a:bodyPr>
-          <a:lstStyle/>
-          <a:p>
-            <a:pPr algn="l"/>
-            <a:r>
-              <a:rPr sz="1500" b="1" i="0">
-                <a:solidFill>
-                  <a:srgbClr val="1F5C3A"/>
-                </a:solidFill>
-                <a:latin typeface="Calibri"/>
-              </a:rPr>
-              <a:t>Grupo 4</a:t>
-            </a:r>
-          </a:p>
-        </p:txBody>
-      </p:sp>
-      <p:sp>
-        <p:nvSpPr>
-          <p:cNvPr id="18" name="TextBox 17"/>
-          <p:cNvSpPr txBox="1"/>
-          <p:nvPr/>
-        </p:nvSpPr>
-        <p:spPr>
-          <a:xfrm>
-            <a:off x="777240" y="4297680"/>
-            <a:ext cx="3337560" cy="1737360"/>
-          </a:xfrm>
-          <a:prstGeom prst="rect">
-            <a:avLst/>
-          </a:prstGeom>
-          <a:noFill/>
-        </p:spPr>
-        <p:txBody>
-          <a:bodyPr wrap="square" lIns="45720" rIns="45720" tIns="27432" bIns="27432" anchor="t">
-            <a:spAutoFit/>
-          </a:bodyPr>
-          <a:lstStyle/>
-          <a:p>
-            <a:pPr algn="l"/>
-            <a:r>
-              <a:rPr sz="1200" b="0" i="0">
-                <a:solidFill>
-                  <a:srgbClr val="1E2A24"/>
-                </a:solidFill>
-                <a:latin typeface="Calibri"/>
-              </a:rPr>
-              <a:t>Monetti, Luciano · Agro</a:t>
-            </a:r>
-          </a:p>
-          <a:p>
-            <a:pPr algn="l"/>
-            <a:r>
-              <a:rPr sz="1200" b="0" i="0">
-                <a:solidFill>
-                  <a:srgbClr val="1E2A24"/>
-                </a:solidFill>
-                <a:latin typeface="Calibri"/>
-              </a:rPr>
-              <a:t>Monetti, Tami Noelia · IT y Admin.</a:t>
-            </a:r>
-          </a:p>
-          <a:p>
-            <a:pPr algn="l"/>
-            <a:r>
-              <a:rPr sz="1200" b="0" i="0">
-                <a:solidFill>
-                  <a:srgbClr val="1E2A24"/>
-                </a:solidFill>
-                <a:latin typeface="Calibri"/>
-              </a:rPr>
-              <a:t>Vogler, Ignacio · Negocios Globales</a:t>
-            </a:r>
-          </a:p>
-          <a:p>
-            <a:pPr algn="l"/>
-            <a:r>
-              <a:rPr sz="1200" b="0" i="0">
-                <a:solidFill>
-                  <a:srgbClr val="1E2A24"/>
-                </a:solidFill>
-                <a:latin typeface="Calibri"/>
-              </a:rPr>
-              <a:t>Wolyniec, Ginette · Proteína Animal</a:t>
-            </a:r>
-          </a:p>
-          <a:p>
-            <a:pPr algn="l"/>
-            <a:r>
-              <a:rPr sz="1200" b="0" i="0">
-                <a:solidFill>
-                  <a:srgbClr val="1E2A24"/>
-                </a:solidFill>
-                <a:latin typeface="Calibri"/>
-              </a:rPr>
-              <a:t>Arias Maboli, Damian · Soporte</a:t>
-            </a:r>
-          </a:p>
-        </p:txBody>
-      </p:sp>
-      <p:sp>
-        <p:nvSpPr>
-          <p:cNvPr id="19" name="Rounded Rectangle 18"/>
+          <p:cNvPr id="11" name="Pie 10"/>
           <p:cNvSpPr/>
           <p:nvPr/>
         </p:nvSpPr>
         <p:spPr>
           <a:xfrm>
-            <a:off x="4389120" y="3840480"/>
-            <a:ext cx="3566160" cy="2103120"/>
-          </a:xfrm>
-          <a:prstGeom prst="roundRect">
-            <a:avLst/>
+            <a:off x="4771339" y="2649931"/>
+            <a:ext cx="2655417" cy="2655417"/>
+          </a:xfrm>
+          <a:prstGeom prst="pie">
+            <a:avLst>
+              <a:gd name="adj1" fmla="val 16200000"/>
+              <a:gd name="adj2" fmla="val 0"/>
+            </a:avLst>
           </a:prstGeom>
           <a:solidFill>
-            <a:srgbClr val="EAF2EC"/>
+            <a:srgbClr val="F3D06C"/>
           </a:solidFill>
           <a:ln>
             <a:noFill/>
@@ -12163,138 +14224,23 @@
       </p:sp>
       <p:sp>
         <p:nvSpPr>
-          <p:cNvPr id="20" name="TextBox 19"/>
-          <p:cNvSpPr txBox="1"/>
-          <p:nvPr/>
-        </p:nvSpPr>
-        <p:spPr>
-          <a:xfrm>
-            <a:off x="4526280" y="3913632"/>
-            <a:ext cx="3291840" cy="365760"/>
-          </a:xfrm>
-          <a:prstGeom prst="rect">
-            <a:avLst/>
-          </a:prstGeom>
-          <a:noFill/>
-        </p:spPr>
-        <p:txBody>
-          <a:bodyPr wrap="square" lIns="45720" rIns="45720" tIns="27432" bIns="27432" anchor="t">
-            <a:spAutoFit/>
-          </a:bodyPr>
-          <a:lstStyle/>
-          <a:p>
-            <a:pPr algn="l"/>
-            <a:r>
-              <a:rPr sz="1500" b="1" i="0">
-                <a:solidFill>
-                  <a:srgbClr val="1F5C3A"/>
-                </a:solidFill>
-                <a:latin typeface="Calibri"/>
-              </a:rPr>
-              <a:t>Grupo 5</a:t>
-            </a:r>
-          </a:p>
-        </p:txBody>
-      </p:sp>
-      <p:sp>
-        <p:nvSpPr>
-          <p:cNvPr id="21" name="TextBox 20"/>
-          <p:cNvSpPr txBox="1"/>
-          <p:nvPr/>
-        </p:nvSpPr>
-        <p:spPr>
-          <a:xfrm>
-            <a:off x="4526280" y="4297680"/>
-            <a:ext cx="3337560" cy="1737360"/>
-          </a:xfrm>
-          <a:prstGeom prst="rect">
-            <a:avLst/>
-          </a:prstGeom>
-          <a:noFill/>
-        </p:spPr>
-        <p:txBody>
-          <a:bodyPr wrap="square" lIns="45720" rIns="45720" tIns="27432" bIns="27432" anchor="t">
-            <a:spAutoFit/>
-          </a:bodyPr>
-          <a:lstStyle/>
-          <a:p>
-            <a:pPr algn="l"/>
-            <a:r>
-              <a:rPr sz="1200" b="0" i="0">
-                <a:solidFill>
-                  <a:srgbClr val="1E2A24"/>
-                </a:solidFill>
-                <a:latin typeface="Calibri"/>
-              </a:rPr>
-              <a:t>Przysiezny, Joaquin · Agro</a:t>
-            </a:r>
-          </a:p>
-          <a:p>
-            <a:pPr algn="l"/>
-            <a:r>
-              <a:rPr sz="1200" b="0" i="0">
-                <a:solidFill>
-                  <a:srgbClr val="1E2A24"/>
-                </a:solidFill>
-                <a:latin typeface="Calibri"/>
-              </a:rPr>
-              <a:t>Kretek, Juan Manuel · Finanzas</a:t>
-            </a:r>
-          </a:p>
-          <a:p>
-            <a:pPr algn="l"/>
-            <a:r>
-              <a:rPr sz="1200" b="0" i="0">
-                <a:solidFill>
-                  <a:srgbClr val="1E2A24"/>
-                </a:solidFill>
-                <a:latin typeface="Calibri"/>
-              </a:rPr>
-              <a:t>Gonzalez, Maximiliano · Proteína Animal</a:t>
-            </a:r>
-          </a:p>
-          <a:p>
-            <a:pPr algn="l"/>
-            <a:r>
-              <a:rPr sz="1200" b="0" i="0">
-                <a:solidFill>
-                  <a:srgbClr val="1E2A24"/>
-                </a:solidFill>
-                <a:latin typeface="Calibri"/>
-              </a:rPr>
-              <a:t>Sentous, Martin Ernesto · Proteína Animal</a:t>
-            </a:r>
-          </a:p>
-          <a:p>
-            <a:pPr algn="l"/>
-            <a:r>
-              <a:rPr sz="1200" b="0" i="0">
-                <a:solidFill>
-                  <a:srgbClr val="1E2A24"/>
-                </a:solidFill>
-                <a:latin typeface="Calibri"/>
-              </a:rPr>
-              <a:t>Bruno, Pedro Lujan · Negocios Urbanos</a:t>
-            </a:r>
-          </a:p>
-        </p:txBody>
-      </p:sp>
-      <p:sp>
-        <p:nvSpPr>
-          <p:cNvPr id="22" name="Rounded Rectangle 21"/>
+          <p:cNvPr id="12" name="Pie 11"/>
           <p:cNvSpPr/>
           <p:nvPr/>
         </p:nvSpPr>
         <p:spPr>
           <a:xfrm>
-            <a:off x="8138159" y="3840480"/>
-            <a:ext cx="3566160" cy="2103120"/>
-          </a:xfrm>
-          <a:prstGeom prst="roundRect">
-            <a:avLst/>
+            <a:off x="5435193" y="3313785"/>
+            <a:ext cx="1327708" cy="1327708"/>
+          </a:xfrm>
+          <a:prstGeom prst="pie">
+            <a:avLst>
+              <a:gd name="adj1" fmla="val 16200000"/>
+              <a:gd name="adj2" fmla="val 0"/>
+            </a:avLst>
           </a:prstGeom>
           <a:solidFill>
-            <a:srgbClr val="EAF2EC"/>
+            <a:srgbClr val="F8E6AF"/>
           </a:solidFill>
           <a:ln>
             <a:noFill/>
@@ -12325,14 +14271,466 @@
       </p:sp>
       <p:sp>
         <p:nvSpPr>
+          <p:cNvPr id="13" name="Pie 12"/>
+          <p:cNvSpPr/>
+          <p:nvPr/>
+        </p:nvSpPr>
+        <p:spPr>
+          <a:xfrm>
+            <a:off x="4087368" y="1965959"/>
+            <a:ext cx="4023360" cy="4023360"/>
+          </a:xfrm>
+          <a:prstGeom prst="pie">
+            <a:avLst>
+              <a:gd name="adj1" fmla="val 0"/>
+              <a:gd name="adj2" fmla="val 5400000"/>
+            </a:avLst>
+          </a:prstGeom>
+          <a:solidFill>
+            <a:srgbClr val="C8352F"/>
+          </a:solidFill>
+          <a:ln>
+            <a:noFill/>
+          </a:ln>
+          <a:effectLst/>
+        </p:spPr>
+        <p:style>
+          <a:lnRef idx="1">
+            <a:schemeClr val="accent1"/>
+          </a:lnRef>
+          <a:fillRef idx="3">
+            <a:schemeClr val="accent1"/>
+          </a:fillRef>
+          <a:effectRef idx="2">
+            <a:schemeClr val="accent1"/>
+          </a:effectRef>
+          <a:fontRef idx="minor">
+            <a:schemeClr val="lt1"/>
+          </a:fontRef>
+        </p:style>
+        <p:txBody>
+          <a:bodyPr rtlCol="0" anchor="ctr"/>
+          <a:lstStyle/>
+          <a:p>
+            <a:pPr algn="ctr"/>
+          </a:p>
+        </p:txBody>
+      </p:sp>
+      <p:sp>
+        <p:nvSpPr>
+          <p:cNvPr id="14" name="Pie 13"/>
+          <p:cNvSpPr/>
+          <p:nvPr/>
+        </p:nvSpPr>
+        <p:spPr>
+          <a:xfrm>
+            <a:off x="4771339" y="2649931"/>
+            <a:ext cx="2655417" cy="2655417"/>
+          </a:xfrm>
+          <a:prstGeom prst="pie">
+            <a:avLst>
+              <a:gd name="adj1" fmla="val 0"/>
+              <a:gd name="adj2" fmla="val 5400000"/>
+            </a:avLst>
+          </a:prstGeom>
+          <a:solidFill>
+            <a:srgbClr val="DB7B77"/>
+          </a:solidFill>
+          <a:ln>
+            <a:noFill/>
+          </a:ln>
+          <a:effectLst/>
+        </p:spPr>
+        <p:style>
+          <a:lnRef idx="1">
+            <a:schemeClr val="accent1"/>
+          </a:lnRef>
+          <a:fillRef idx="3">
+            <a:schemeClr val="accent1"/>
+          </a:fillRef>
+          <a:effectRef idx="2">
+            <a:schemeClr val="accent1"/>
+          </a:effectRef>
+          <a:fontRef idx="minor">
+            <a:schemeClr val="lt1"/>
+          </a:fontRef>
+        </p:style>
+        <p:txBody>
+          <a:bodyPr rtlCol="0" anchor="ctr"/>
+          <a:lstStyle/>
+          <a:p>
+            <a:pPr algn="ctr"/>
+          </a:p>
+        </p:txBody>
+      </p:sp>
+      <p:sp>
+        <p:nvSpPr>
+          <p:cNvPr id="15" name="Pie 14"/>
+          <p:cNvSpPr/>
+          <p:nvPr/>
+        </p:nvSpPr>
+        <p:spPr>
+          <a:xfrm>
+            <a:off x="5435193" y="3313785"/>
+            <a:ext cx="1327708" cy="1327708"/>
+          </a:xfrm>
+          <a:prstGeom prst="pie">
+            <a:avLst>
+              <a:gd name="adj1" fmla="val 0"/>
+              <a:gd name="adj2" fmla="val 5400000"/>
+            </a:avLst>
+          </a:prstGeom>
+          <a:solidFill>
+            <a:srgbClr val="EBB8B6"/>
+          </a:solidFill>
+          <a:ln>
+            <a:noFill/>
+          </a:ln>
+          <a:effectLst/>
+        </p:spPr>
+        <p:style>
+          <a:lnRef idx="1">
+            <a:schemeClr val="accent1"/>
+          </a:lnRef>
+          <a:fillRef idx="3">
+            <a:schemeClr val="accent1"/>
+          </a:fillRef>
+          <a:effectRef idx="2">
+            <a:schemeClr val="accent1"/>
+          </a:effectRef>
+          <a:fontRef idx="minor">
+            <a:schemeClr val="lt1"/>
+          </a:fontRef>
+        </p:style>
+        <p:txBody>
+          <a:bodyPr rtlCol="0" anchor="ctr"/>
+          <a:lstStyle/>
+          <a:p>
+            <a:pPr algn="ctr"/>
+          </a:p>
+        </p:txBody>
+      </p:sp>
+      <p:sp>
+        <p:nvSpPr>
+          <p:cNvPr id="16" name="Pie 15"/>
+          <p:cNvSpPr/>
+          <p:nvPr/>
+        </p:nvSpPr>
+        <p:spPr>
+          <a:xfrm>
+            <a:off x="4087368" y="1965959"/>
+            <a:ext cx="4023360" cy="4023360"/>
+          </a:xfrm>
+          <a:prstGeom prst="pie">
+            <a:avLst>
+              <a:gd name="adj1" fmla="val 5400000"/>
+              <a:gd name="adj2" fmla="val 10800000"/>
+            </a:avLst>
+          </a:prstGeom>
+          <a:solidFill>
+            <a:srgbClr val="2E8B57"/>
+          </a:solidFill>
+          <a:ln>
+            <a:noFill/>
+          </a:ln>
+          <a:effectLst/>
+        </p:spPr>
+        <p:style>
+          <a:lnRef idx="1">
+            <a:schemeClr val="accent1"/>
+          </a:lnRef>
+          <a:fillRef idx="3">
+            <a:schemeClr val="accent1"/>
+          </a:fillRef>
+          <a:effectRef idx="2">
+            <a:schemeClr val="accent1"/>
+          </a:effectRef>
+          <a:fontRef idx="minor">
+            <a:schemeClr val="lt1"/>
+          </a:fontRef>
+        </p:style>
+        <p:txBody>
+          <a:bodyPr rtlCol="0" anchor="ctr"/>
+          <a:lstStyle/>
+          <a:p>
+            <a:pPr algn="ctr"/>
+          </a:p>
+        </p:txBody>
+      </p:sp>
+      <p:sp>
+        <p:nvSpPr>
+          <p:cNvPr id="17" name="Pie 16"/>
+          <p:cNvSpPr/>
+          <p:nvPr/>
+        </p:nvSpPr>
+        <p:spPr>
+          <a:xfrm>
+            <a:off x="4771339" y="2649931"/>
+            <a:ext cx="2655417" cy="2655417"/>
+          </a:xfrm>
+          <a:prstGeom prst="pie">
+            <a:avLst>
+              <a:gd name="adj1" fmla="val 5400000"/>
+              <a:gd name="adj2" fmla="val 10800000"/>
+            </a:avLst>
+          </a:prstGeom>
+          <a:solidFill>
+            <a:srgbClr val="77B391"/>
+          </a:solidFill>
+          <a:ln>
+            <a:noFill/>
+          </a:ln>
+          <a:effectLst/>
+        </p:spPr>
+        <p:style>
+          <a:lnRef idx="1">
+            <a:schemeClr val="accent1"/>
+          </a:lnRef>
+          <a:fillRef idx="3">
+            <a:schemeClr val="accent1"/>
+          </a:fillRef>
+          <a:effectRef idx="2">
+            <a:schemeClr val="accent1"/>
+          </a:effectRef>
+          <a:fontRef idx="minor">
+            <a:schemeClr val="lt1"/>
+          </a:fontRef>
+        </p:style>
+        <p:txBody>
+          <a:bodyPr rtlCol="0" anchor="ctr"/>
+          <a:lstStyle/>
+          <a:p>
+            <a:pPr algn="ctr"/>
+          </a:p>
+        </p:txBody>
+      </p:sp>
+      <p:sp>
+        <p:nvSpPr>
+          <p:cNvPr id="18" name="Pie 17"/>
+          <p:cNvSpPr/>
+          <p:nvPr/>
+        </p:nvSpPr>
+        <p:spPr>
+          <a:xfrm>
+            <a:off x="5435193" y="3313785"/>
+            <a:ext cx="1327708" cy="1327708"/>
+          </a:xfrm>
+          <a:prstGeom prst="pie">
+            <a:avLst>
+              <a:gd name="adj1" fmla="val 5400000"/>
+              <a:gd name="adj2" fmla="val 10800000"/>
+            </a:avLst>
+          </a:prstGeom>
+          <a:solidFill>
+            <a:srgbClr val="B5D6C4"/>
+          </a:solidFill>
+          <a:ln>
+            <a:noFill/>
+          </a:ln>
+          <a:effectLst/>
+        </p:spPr>
+        <p:style>
+          <a:lnRef idx="1">
+            <a:schemeClr val="accent1"/>
+          </a:lnRef>
+          <a:fillRef idx="3">
+            <a:schemeClr val="accent1"/>
+          </a:fillRef>
+          <a:effectRef idx="2">
+            <a:schemeClr val="accent1"/>
+          </a:effectRef>
+          <a:fontRef idx="minor">
+            <a:schemeClr val="lt1"/>
+          </a:fontRef>
+        </p:style>
+        <p:txBody>
+          <a:bodyPr rtlCol="0" anchor="ctr"/>
+          <a:lstStyle/>
+          <a:p>
+            <a:pPr algn="ctr"/>
+          </a:p>
+        </p:txBody>
+      </p:sp>
+      <p:sp>
+        <p:nvSpPr>
+          <p:cNvPr id="19" name="TextBox 18"/>
+          <p:cNvSpPr txBox="1"/>
+          <p:nvPr/>
+        </p:nvSpPr>
+        <p:spPr>
+          <a:xfrm>
+            <a:off x="5184648" y="2152497"/>
+            <a:ext cx="1828800" cy="310896"/>
+          </a:xfrm>
+          <a:prstGeom prst="rect">
+            <a:avLst/>
+          </a:prstGeom>
+          <a:noFill/>
+        </p:spPr>
+        <p:txBody>
+          <a:bodyPr wrap="square" lIns="45720" rIns="45720" tIns="27432" bIns="27432" anchor="ctr">
+            <a:spAutoFit/>
+          </a:bodyPr>
+          <a:lstStyle/>
+          <a:p>
+            <a:pPr algn="ctr"/>
+            <a:r>
+              <a:rPr sz="1100" b="1" i="0">
+                <a:solidFill>
+                  <a:srgbClr val="1E2A24"/>
+                </a:solidFill>
+                <a:latin typeface="Calibri"/>
+              </a:rPr>
+              <a:t>1. Prefiere (más de 66)</a:t>
+            </a:r>
+          </a:p>
+        </p:txBody>
+      </p:sp>
+      <p:sp>
+        <p:nvSpPr>
+          <p:cNvPr id="20" name="TextBox 19"/>
+          <p:cNvSpPr txBox="1"/>
+          <p:nvPr/>
+        </p:nvSpPr>
+        <p:spPr>
+          <a:xfrm>
+            <a:off x="5184648" y="2816351"/>
+            <a:ext cx="1828800" cy="310896"/>
+          </a:xfrm>
+          <a:prstGeom prst="rect">
+            <a:avLst/>
+          </a:prstGeom>
+          <a:noFill/>
+        </p:spPr>
+        <p:txBody>
+          <a:bodyPr wrap="square" lIns="45720" rIns="45720" tIns="27432" bIns="27432" anchor="ctr">
+            <a:spAutoFit/>
+          </a:bodyPr>
+          <a:lstStyle/>
+          <a:p>
+            <a:pPr algn="ctr"/>
+            <a:r>
+              <a:rPr sz="1100" b="1" i="0">
+                <a:solidFill>
+                  <a:srgbClr val="1E2A24"/>
+                </a:solidFill>
+                <a:latin typeface="Calibri"/>
+              </a:rPr>
+              <a:t>2. Utiliza (33 a 66)</a:t>
+            </a:r>
+          </a:p>
+        </p:txBody>
+      </p:sp>
+      <p:sp>
+        <p:nvSpPr>
+          <p:cNvPr id="21" name="TextBox 20"/>
+          <p:cNvSpPr txBox="1"/>
+          <p:nvPr/>
+        </p:nvSpPr>
+        <p:spPr>
+          <a:xfrm>
+            <a:off x="5184648" y="3500323"/>
+            <a:ext cx="1828800" cy="310896"/>
+          </a:xfrm>
+          <a:prstGeom prst="rect">
+            <a:avLst/>
+          </a:prstGeom>
+          <a:noFill/>
+        </p:spPr>
+        <p:txBody>
+          <a:bodyPr wrap="square" lIns="45720" rIns="45720" tIns="27432" bIns="27432" anchor="ctr">
+            <a:spAutoFit/>
+          </a:bodyPr>
+          <a:lstStyle/>
+          <a:p>
+            <a:pPr algn="ctr"/>
+            <a:r>
+              <a:rPr sz="1100" b="1" i="0">
+                <a:solidFill>
+                  <a:srgbClr val="1E2A24"/>
+                </a:solidFill>
+                <a:latin typeface="Calibri"/>
+              </a:rPr>
+              <a:t>3. Rechaza (0 a 33)</a:t>
+            </a:r>
+          </a:p>
+        </p:txBody>
+      </p:sp>
+      <p:sp>
+        <p:nvSpPr>
+          <p:cNvPr id="22" name="Freeform 21"/>
+          <p:cNvSpPr/>
+          <p:nvPr/>
+        </p:nvSpPr>
+        <p:spPr>
+          <a:xfrm>
+            <a:off x="5700755" y="2583616"/>
+            <a:ext cx="1792316" cy="2532002"/>
+          </a:xfrm>
+          <a:custGeom>
+            <a:avLst/>
+            <a:gdLst/>
+            <a:ahLst/>
+            <a:cxnLst/>
+            <a:rect l="l" t="t" r="r" b="b"/>
+            <a:pathLst>
+              <a:path w="1792316" h="2532002">
+                <a:moveTo>
+                  <a:pt x="113798" y="1109529"/>
+                </a:moveTo>
+                <a:lnTo>
+                  <a:pt x="1792316" y="0"/>
+                </a:lnTo>
+                <a:lnTo>
+                  <a:pt x="1536271" y="2532002"/>
+                </a:lnTo>
+                <a:lnTo>
+                  <a:pt x="0" y="1792316"/>
+                </a:lnTo>
+                <a:close/>
+              </a:path>
+            </a:pathLst>
+          </a:custGeom>
+          <a:noFill/>
+          <a:ln w="38100">
+            <a:solidFill>
+              <a:srgbClr val="1E2A24"/>
+            </a:solidFill>
+          </a:ln>
+          <a:effectLst/>
+        </p:spPr>
+        <p:style>
+          <a:lnRef idx="1">
+            <a:schemeClr val="accent1"/>
+          </a:lnRef>
+          <a:fillRef idx="3">
+            <a:schemeClr val="accent1"/>
+          </a:fillRef>
+          <a:effectRef idx="2">
+            <a:schemeClr val="accent1"/>
+          </a:effectRef>
+          <a:fontRef idx="minor">
+            <a:schemeClr val="lt1"/>
+          </a:fontRef>
+        </p:style>
+        <p:txBody>
+          <a:bodyPr rtlCol="0" anchor="ctr"/>
+          <a:lstStyle/>
+          <a:p>
+            <a:pPr algn="ctr"/>
+          </a:p>
+        </p:txBody>
+      </p:sp>
+      <p:sp>
+        <p:nvSpPr>
           <p:cNvPr id="23" name="TextBox 22"/>
           <p:cNvSpPr txBox="1"/>
           <p:nvPr/>
         </p:nvSpPr>
         <p:spPr>
           <a:xfrm>
-            <a:off x="8275319" y="3913632"/>
-            <a:ext cx="3291840" cy="365760"/>
+            <a:off x="4636008" y="6053328"/>
+            <a:ext cx="2926080" cy="274320"/>
           </a:xfrm>
           <a:prstGeom prst="rect">
             <a:avLst/>
@@ -12345,29 +14743,64 @@
           </a:bodyPr>
           <a:lstStyle/>
           <a:p>
+            <a:pPr algn="ctr"/>
+            <a:r>
+              <a:rPr sz="1100" b="0" i="1">
+                <a:solidFill>
+                  <a:srgbClr val="6B7A72"/>
+                </a:solidFill>
+                <a:latin typeface="Calibri"/>
+              </a:rPr>
+              <a:t>Ejemplo ilustrativo de perfil</a:t>
+            </a:r>
+          </a:p>
+        </p:txBody>
+      </p:sp>
+      <p:sp>
+        <p:nvSpPr>
+          <p:cNvPr id="24" name="TextBox 23"/>
+          <p:cNvSpPr txBox="1"/>
+          <p:nvPr/>
+        </p:nvSpPr>
+        <p:spPr>
+          <a:xfrm>
+            <a:off x="731520" y="1508760"/>
+            <a:ext cx="3017520" cy="731520"/>
+          </a:xfrm>
+          <a:prstGeom prst="rect">
+            <a:avLst/>
+          </a:prstGeom>
+          <a:noFill/>
+        </p:spPr>
+        <p:txBody>
+          <a:bodyPr wrap="square" lIns="45720" rIns="45720" tIns="27432" bIns="27432" anchor="t">
+            <a:spAutoFit/>
+          </a:bodyPr>
+          <a:lstStyle/>
+          <a:p>
             <a:pPr algn="l"/>
             <a:r>
-              <a:rPr sz="1500" b="1" i="0">
-                <a:solidFill>
-                  <a:srgbClr val="1F5C3A"/>
-                </a:solidFill>
-                <a:latin typeface="Calibri"/>
-              </a:rPr>
-              <a:t>Grupo 6</a:t>
-            </a:r>
-          </a:p>
-        </p:txBody>
-      </p:sp>
-      <p:sp>
-        <p:nvSpPr>
-          <p:cNvPr id="24" name="TextBox 23"/>
-          <p:cNvSpPr txBox="1"/>
-          <p:nvPr/>
-        </p:nvSpPr>
-        <p:spPr>
-          <a:xfrm>
-            <a:off x="8275319" y="4297680"/>
-            <a:ext cx="3337560" cy="1737360"/>
+              <a:rPr sz="4000" b="1" i="0">
+                <a:solidFill>
+                  <a:srgbClr val="2F7DC1"/>
+                </a:solidFill>
+                <a:latin typeface="Calibri"/>
+              </a:rPr>
+              <a:t>A</a:t>
+            </a:r>
+          </a:p>
+        </p:txBody>
+      </p:sp>
+      <p:sp>
+        <p:nvSpPr>
+          <p:cNvPr id="25" name="TextBox 24"/>
+          <p:cNvSpPr txBox="1"/>
+          <p:nvPr/>
+        </p:nvSpPr>
+        <p:spPr>
+          <a:xfrm>
+            <a:off x="731520" y="2194560"/>
+            <a:ext cx="3017520" cy="320040"/>
           </a:xfrm>
           <a:prstGeom prst="rect">
             <a:avLst/>
@@ -12382,63 +14815,486 @@
           <a:p>
             <a:pPr algn="l"/>
             <a:r>
-              <a:rPr sz="1200" b="0" i="0">
+              <a:rPr sz="1400" b="1" i="0">
                 <a:solidFill>
                   <a:srgbClr val="1E2A24"/>
                 </a:solidFill>
                 <a:latin typeface="Calibri"/>
               </a:rPr>
-              <a:t>Amprino, Gisela Soledad · Cultura Org.</a:t>
-            </a:r>
-          </a:p>
+              <a:t>Superior izquierdo</a:t>
+            </a:r>
+          </a:p>
+        </p:txBody>
+      </p:sp>
+      <p:sp>
+        <p:nvSpPr>
+          <p:cNvPr id="26" name="TextBox 25"/>
+          <p:cNvSpPr txBox="1"/>
+          <p:nvPr/>
+        </p:nvSpPr>
+        <p:spPr>
+          <a:xfrm>
+            <a:off x="731520" y="2514600"/>
+            <a:ext cx="3017520" cy="1280160"/>
+          </a:xfrm>
+          <a:prstGeom prst="rect">
+            <a:avLst/>
+          </a:prstGeom>
+          <a:noFill/>
+        </p:spPr>
+        <p:txBody>
+          <a:bodyPr wrap="square" lIns="45720" rIns="45720" tIns="27432" bIns="27432" anchor="t">
+            <a:spAutoFit/>
+          </a:bodyPr>
+          <a:lstStyle/>
           <a:p>
             <a:pPr algn="l"/>
             <a:r>
-              <a:rPr sz="1200" b="0" i="0">
+              <a:rPr sz="1300" b="0" i="0">
+                <a:solidFill>
+                  <a:srgbClr val="6B7A72"/>
+                </a:solidFill>
+                <a:latin typeface="Calibri"/>
+              </a:rPr>
+              <a:t>Resuelve problemas</a:t>
+            </a:r>
+          </a:p>
+          <a:p>
+            <a:pPr algn="l"/>
+            <a:r>
+              <a:rPr sz="1300" b="0" i="0">
+                <a:solidFill>
+                  <a:srgbClr val="6B7A72"/>
+                </a:solidFill>
+                <a:latin typeface="Calibri"/>
+              </a:rPr>
+              <a:t>Matemático</a:t>
+            </a:r>
+          </a:p>
+          <a:p>
+            <a:pPr algn="l"/>
+            <a:r>
+              <a:rPr sz="1300" b="0" i="0">
+                <a:solidFill>
+                  <a:srgbClr val="6B7A72"/>
+                </a:solidFill>
+                <a:latin typeface="Calibri"/>
+              </a:rPr>
+              <a:t>Técnico</a:t>
+            </a:r>
+          </a:p>
+          <a:p>
+            <a:pPr algn="l"/>
+            <a:r>
+              <a:rPr sz="1300" b="0" i="0">
+                <a:solidFill>
+                  <a:srgbClr val="6B7A72"/>
+                </a:solidFill>
+                <a:latin typeface="Calibri"/>
+              </a:rPr>
+              <a:t>Analizador</a:t>
+            </a:r>
+          </a:p>
+          <a:p>
+            <a:pPr algn="l"/>
+            <a:r>
+              <a:rPr sz="1300" b="0" i="0">
+                <a:solidFill>
+                  <a:srgbClr val="6B7A72"/>
+                </a:solidFill>
+                <a:latin typeface="Calibri"/>
+              </a:rPr>
+              <a:t>Lógico</a:t>
+            </a:r>
+          </a:p>
+        </p:txBody>
+      </p:sp>
+      <p:sp>
+        <p:nvSpPr>
+          <p:cNvPr id="27" name="TextBox 26"/>
+          <p:cNvSpPr txBox="1"/>
+          <p:nvPr/>
+        </p:nvSpPr>
+        <p:spPr>
+          <a:xfrm>
+            <a:off x="8412480" y="1508760"/>
+            <a:ext cx="3017520" cy="731520"/>
+          </a:xfrm>
+          <a:prstGeom prst="rect">
+            <a:avLst/>
+          </a:prstGeom>
+          <a:noFill/>
+        </p:spPr>
+        <p:txBody>
+          <a:bodyPr wrap="square" lIns="45720" rIns="45720" tIns="27432" bIns="27432" anchor="t">
+            <a:spAutoFit/>
+          </a:bodyPr>
+          <a:lstStyle/>
+          <a:p>
+            <a:pPr algn="r"/>
+            <a:r>
+              <a:rPr sz="4000" b="1" i="0">
+                <a:solidFill>
+                  <a:srgbClr val="EDB81D"/>
+                </a:solidFill>
+                <a:latin typeface="Calibri"/>
+              </a:rPr>
+              <a:t>D</a:t>
+            </a:r>
+          </a:p>
+        </p:txBody>
+      </p:sp>
+      <p:sp>
+        <p:nvSpPr>
+          <p:cNvPr id="28" name="TextBox 27"/>
+          <p:cNvSpPr txBox="1"/>
+          <p:nvPr/>
+        </p:nvSpPr>
+        <p:spPr>
+          <a:xfrm>
+            <a:off x="8412480" y="2194560"/>
+            <a:ext cx="3017520" cy="320040"/>
+          </a:xfrm>
+          <a:prstGeom prst="rect">
+            <a:avLst/>
+          </a:prstGeom>
+          <a:noFill/>
+        </p:spPr>
+        <p:txBody>
+          <a:bodyPr wrap="square" lIns="45720" rIns="45720" tIns="27432" bIns="27432" anchor="t">
+            <a:spAutoFit/>
+          </a:bodyPr>
+          <a:lstStyle/>
+          <a:p>
+            <a:pPr algn="r"/>
+            <a:r>
+              <a:rPr sz="1400" b="1" i="0">
                 <a:solidFill>
                   <a:srgbClr val="1E2A24"/>
                 </a:solidFill>
                 <a:latin typeface="Calibri"/>
               </a:rPr>
-              <a:t>Zottola, Benjamin · Cultura Org.</a:t>
-            </a:r>
-          </a:p>
+              <a:t>Superior derecho</a:t>
+            </a:r>
+          </a:p>
+        </p:txBody>
+      </p:sp>
+      <p:sp>
+        <p:nvSpPr>
+          <p:cNvPr id="29" name="TextBox 28"/>
+          <p:cNvSpPr txBox="1"/>
+          <p:nvPr/>
+        </p:nvSpPr>
+        <p:spPr>
+          <a:xfrm>
+            <a:off x="8412480" y="2514600"/>
+            <a:ext cx="3017520" cy="1280160"/>
+          </a:xfrm>
+          <a:prstGeom prst="rect">
+            <a:avLst/>
+          </a:prstGeom>
+          <a:noFill/>
+        </p:spPr>
+        <p:txBody>
+          <a:bodyPr wrap="square" lIns="45720" rIns="45720" tIns="27432" bIns="27432" anchor="t">
+            <a:spAutoFit/>
+          </a:bodyPr>
+          <a:lstStyle/>
+          <a:p>
+            <a:pPr algn="r"/>
+            <a:r>
+              <a:rPr sz="1300" b="0" i="0">
+                <a:solidFill>
+                  <a:srgbClr val="6B7A72"/>
+                </a:solidFill>
+                <a:latin typeface="Calibri"/>
+              </a:rPr>
+              <a:t>Conceptualizador</a:t>
+            </a:r>
+          </a:p>
+          <a:p>
+            <a:pPr algn="r"/>
+            <a:r>
+              <a:rPr sz="1300" b="0" i="0">
+                <a:solidFill>
+                  <a:srgbClr val="6B7A72"/>
+                </a:solidFill>
+                <a:latin typeface="Calibri"/>
+              </a:rPr>
+              <a:t>Sintetizador</a:t>
+            </a:r>
+          </a:p>
+          <a:p>
+            <a:pPr algn="r"/>
+            <a:r>
+              <a:rPr sz="1300" b="0" i="0">
+                <a:solidFill>
+                  <a:srgbClr val="6B7A72"/>
+                </a:solidFill>
+                <a:latin typeface="Calibri"/>
+              </a:rPr>
+              <a:t>Imaginativo</a:t>
+            </a:r>
+          </a:p>
+          <a:p>
+            <a:pPr algn="r"/>
+            <a:r>
+              <a:rPr sz="1300" b="0" i="0">
+                <a:solidFill>
+                  <a:srgbClr val="6B7A72"/>
+                </a:solidFill>
+                <a:latin typeface="Calibri"/>
+              </a:rPr>
+              <a:t>Holístico</a:t>
+            </a:r>
+          </a:p>
+          <a:p>
+            <a:pPr algn="r"/>
+            <a:r>
+              <a:rPr sz="1300" b="0" i="0">
+                <a:solidFill>
+                  <a:srgbClr val="6B7A72"/>
+                </a:solidFill>
+                <a:latin typeface="Calibri"/>
+              </a:rPr>
+              <a:t>Artístico</a:t>
+            </a:r>
+          </a:p>
+        </p:txBody>
+      </p:sp>
+      <p:sp>
+        <p:nvSpPr>
+          <p:cNvPr id="30" name="TextBox 29"/>
+          <p:cNvSpPr txBox="1"/>
+          <p:nvPr/>
+        </p:nvSpPr>
+        <p:spPr>
+          <a:xfrm>
+            <a:off x="731520" y="4160520"/>
+            <a:ext cx="3017520" cy="731520"/>
+          </a:xfrm>
+          <a:prstGeom prst="rect">
+            <a:avLst/>
+          </a:prstGeom>
+          <a:noFill/>
+        </p:spPr>
+        <p:txBody>
+          <a:bodyPr wrap="square" lIns="45720" rIns="45720" tIns="27432" bIns="27432" anchor="t">
+            <a:spAutoFit/>
+          </a:bodyPr>
+          <a:lstStyle/>
           <a:p>
             <a:pPr algn="l"/>
             <a:r>
-              <a:rPr sz="1200" b="0" i="0">
+              <a:rPr sz="4000" b="1" i="0">
+                <a:solidFill>
+                  <a:srgbClr val="2E8B57"/>
+                </a:solidFill>
+                <a:latin typeface="Calibri"/>
+              </a:rPr>
+              <a:t>B</a:t>
+            </a:r>
+          </a:p>
+        </p:txBody>
+      </p:sp>
+      <p:sp>
+        <p:nvSpPr>
+          <p:cNvPr id="31" name="TextBox 30"/>
+          <p:cNvSpPr txBox="1"/>
+          <p:nvPr/>
+        </p:nvSpPr>
+        <p:spPr>
+          <a:xfrm>
+            <a:off x="731520" y="4846320"/>
+            <a:ext cx="3017520" cy="320040"/>
+          </a:xfrm>
+          <a:prstGeom prst="rect">
+            <a:avLst/>
+          </a:prstGeom>
+          <a:noFill/>
+        </p:spPr>
+        <p:txBody>
+          <a:bodyPr wrap="square" lIns="45720" rIns="45720" tIns="27432" bIns="27432" anchor="t">
+            <a:spAutoFit/>
+          </a:bodyPr>
+          <a:lstStyle/>
+          <a:p>
+            <a:pPr algn="l"/>
+            <a:r>
+              <a:rPr sz="1400" b="1" i="0">
                 <a:solidFill>
                   <a:srgbClr val="1E2A24"/>
                 </a:solidFill>
                 <a:latin typeface="Calibri"/>
               </a:rPr>
-              <a:t>Nasi, Gabriela Cristina · Proteína Animal</a:t>
-            </a:r>
-          </a:p>
+              <a:t>Inferior izquierdo</a:t>
+            </a:r>
+          </a:p>
+        </p:txBody>
+      </p:sp>
+      <p:sp>
+        <p:nvSpPr>
+          <p:cNvPr id="32" name="TextBox 31"/>
+          <p:cNvSpPr txBox="1"/>
+          <p:nvPr/>
+        </p:nvSpPr>
+        <p:spPr>
+          <a:xfrm>
+            <a:off x="731520" y="5166360"/>
+            <a:ext cx="3017520" cy="1280160"/>
+          </a:xfrm>
+          <a:prstGeom prst="rect">
+            <a:avLst/>
+          </a:prstGeom>
+          <a:noFill/>
+        </p:spPr>
+        <p:txBody>
+          <a:bodyPr wrap="square" lIns="45720" rIns="45720" tIns="27432" bIns="27432" anchor="t">
+            <a:spAutoFit/>
+          </a:bodyPr>
+          <a:lstStyle/>
           <a:p>
             <a:pPr algn="l"/>
             <a:r>
-              <a:rPr sz="1200" b="0" i="0">
+              <a:rPr sz="1300" b="0" i="0">
+                <a:solidFill>
+                  <a:srgbClr val="6B7A72"/>
+                </a:solidFill>
+                <a:latin typeface="Calibri"/>
+              </a:rPr>
+              <a:t>Planeador</a:t>
+            </a:r>
+          </a:p>
+          <a:p>
+            <a:pPr algn="l"/>
+            <a:r>
+              <a:rPr sz="1300" b="0" i="0">
+                <a:solidFill>
+                  <a:srgbClr val="6B7A72"/>
+                </a:solidFill>
+                <a:latin typeface="Calibri"/>
+              </a:rPr>
+              <a:t>Controlado</a:t>
+            </a:r>
+          </a:p>
+          <a:p>
+            <a:pPr algn="l"/>
+            <a:r>
+              <a:rPr sz="1300" b="0" i="0">
+                <a:solidFill>
+                  <a:srgbClr val="6B7A72"/>
+                </a:solidFill>
+                <a:latin typeface="Calibri"/>
+              </a:rPr>
+              <a:t>Conservador</a:t>
+            </a:r>
+          </a:p>
+          <a:p>
+            <a:pPr algn="l"/>
+            <a:r>
+              <a:rPr sz="1300" b="0" i="0">
+                <a:solidFill>
+                  <a:srgbClr val="6B7A72"/>
+                </a:solidFill>
+                <a:latin typeface="Calibri"/>
+              </a:rPr>
+              <a:t>Organizador</a:t>
+            </a:r>
+          </a:p>
+          <a:p>
+            <a:pPr algn="l"/>
+            <a:r>
+              <a:rPr sz="1300" b="0" i="0">
+                <a:solidFill>
+                  <a:srgbClr val="6B7A72"/>
+                </a:solidFill>
+                <a:latin typeface="Calibri"/>
+              </a:rPr>
+              <a:t>Administrativo</a:t>
+            </a:r>
+          </a:p>
+        </p:txBody>
+      </p:sp>
+      <p:sp>
+        <p:nvSpPr>
+          <p:cNvPr id="33" name="TextBox 32"/>
+          <p:cNvSpPr txBox="1"/>
+          <p:nvPr/>
+        </p:nvSpPr>
+        <p:spPr>
+          <a:xfrm>
+            <a:off x="8412480" y="4160520"/>
+            <a:ext cx="3017520" cy="731520"/>
+          </a:xfrm>
+          <a:prstGeom prst="rect">
+            <a:avLst/>
+          </a:prstGeom>
+          <a:noFill/>
+        </p:spPr>
+        <p:txBody>
+          <a:bodyPr wrap="square" lIns="45720" rIns="45720" tIns="27432" bIns="27432" anchor="t">
+            <a:spAutoFit/>
+          </a:bodyPr>
+          <a:lstStyle/>
+          <a:p>
+            <a:pPr algn="r"/>
+            <a:r>
+              <a:rPr sz="4000" b="1" i="0">
+                <a:solidFill>
+                  <a:srgbClr val="C8352F"/>
+                </a:solidFill>
+                <a:latin typeface="Calibri"/>
+              </a:rPr>
+              <a:t>C</a:t>
+            </a:r>
+          </a:p>
+        </p:txBody>
+      </p:sp>
+      <p:sp>
+        <p:nvSpPr>
+          <p:cNvPr id="34" name="TextBox 33"/>
+          <p:cNvSpPr txBox="1"/>
+          <p:nvPr/>
+        </p:nvSpPr>
+        <p:spPr>
+          <a:xfrm>
+            <a:off x="8412480" y="4846320"/>
+            <a:ext cx="3017520" cy="320040"/>
+          </a:xfrm>
+          <a:prstGeom prst="rect">
+            <a:avLst/>
+          </a:prstGeom>
+          <a:noFill/>
+        </p:spPr>
+        <p:txBody>
+          <a:bodyPr wrap="square" lIns="45720" rIns="45720" tIns="27432" bIns="27432" anchor="t">
+            <a:spAutoFit/>
+          </a:bodyPr>
+          <a:lstStyle/>
+          <a:p>
+            <a:pPr algn="r"/>
+            <a:r>
+              <a:rPr sz="1400" b="1" i="0">
                 <a:solidFill>
                   <a:srgbClr val="1E2A24"/>
                 </a:solidFill>
                 <a:latin typeface="Calibri"/>
               </a:rPr>
-              <a:t>Oviedo, Julieta · Proteína Animal</a:t>
-            </a:r>
-          </a:p>
-        </p:txBody>
-      </p:sp>
-      <p:sp>
-        <p:nvSpPr>
-          <p:cNvPr id="25" name="TextBox 24"/>
-          <p:cNvSpPr txBox="1"/>
-          <p:nvPr/>
-        </p:nvSpPr>
-        <p:spPr>
-          <a:xfrm>
-            <a:off x="640080" y="6080760"/>
-            <a:ext cx="10972800" cy="274320"/>
+              <a:t>Inferior derecho</a:t>
+            </a:r>
+          </a:p>
+        </p:txBody>
+      </p:sp>
+      <p:sp>
+        <p:nvSpPr>
+          <p:cNvPr id="35" name="TextBox 34"/>
+          <p:cNvSpPr txBox="1"/>
+          <p:nvPr/>
+        </p:nvSpPr>
+        <p:spPr>
+          <a:xfrm>
+            <a:off x="8412480" y="5166360"/>
+            <a:ext cx="3017520" cy="1280160"/>
           </a:xfrm>
           <a:prstGeom prst="rect">
             <a:avLst/>
@@ -12451,15 +15307,98 @@
           </a:bodyPr>
           <a:lstStyle/>
           <a:p>
-            <a:pPr algn="l"/>
-            <a:r>
-              <a:rPr sz="1200" b="0" i="1">
+            <a:pPr algn="r"/>
+            <a:r>
+              <a:rPr sz="1300" b="0" i="0">
                 <a:solidFill>
                   <a:srgbClr val="6B7A72"/>
                 </a:solidFill>
                 <a:latin typeface="Calibri"/>
               </a:rPr>
-              <a:t>Borrador para ajustar con criterio propio y con las gerencias.</a:t>
+              <a:t>Conversador</a:t>
+            </a:r>
+          </a:p>
+          <a:p>
+            <a:pPr algn="r"/>
+            <a:r>
+              <a:rPr sz="1300" b="0" i="0">
+                <a:solidFill>
+                  <a:srgbClr val="6B7A72"/>
+                </a:solidFill>
+                <a:latin typeface="Calibri"/>
+              </a:rPr>
+              <a:t>Musical</a:t>
+            </a:r>
+          </a:p>
+          <a:p>
+            <a:pPr algn="r"/>
+            <a:r>
+              <a:rPr sz="1300" b="0" i="0">
+                <a:solidFill>
+                  <a:srgbClr val="6B7A72"/>
+                </a:solidFill>
+                <a:latin typeface="Calibri"/>
+              </a:rPr>
+              <a:t>Espiritual</a:t>
+            </a:r>
+          </a:p>
+          <a:p>
+            <a:pPr algn="r"/>
+            <a:r>
+              <a:rPr sz="1300" b="0" i="0">
+                <a:solidFill>
+                  <a:srgbClr val="6B7A72"/>
+                </a:solidFill>
+                <a:latin typeface="Calibri"/>
+              </a:rPr>
+              <a:t>Emocional</a:t>
+            </a:r>
+          </a:p>
+          <a:p>
+            <a:pPr algn="r"/>
+            <a:r>
+              <a:rPr sz="1300" b="0" i="0">
+                <a:solidFill>
+                  <a:srgbClr val="6B7A72"/>
+                </a:solidFill>
+                <a:latin typeface="Calibri"/>
+              </a:rPr>
+              <a:t>Interpersonal</a:t>
+            </a:r>
+          </a:p>
+        </p:txBody>
+      </p:sp>
+      <p:sp>
+        <p:nvSpPr>
+          <p:cNvPr id="36" name="TextBox 35"/>
+          <p:cNvSpPr txBox="1"/>
+          <p:nvPr/>
+        </p:nvSpPr>
+        <p:spPr>
+          <a:xfrm>
+            <a:off x="3291840" y="6400800"/>
+            <a:ext cx="5669280" cy="274320"/>
+          </a:xfrm>
+          <a:prstGeom prst="rect">
+            <a:avLst/>
+          </a:prstGeom>
+          <a:noFill/>
+        </p:spPr>
+        <p:txBody>
+          <a:bodyPr wrap="square" lIns="45720" rIns="45720" tIns="27432" bIns="27432" anchor="t">
+            <a:spAutoFit/>
+          </a:bodyPr>
+          <a:lstStyle/>
+          <a:p>
+            <a:pPr algn="ctr"/>
+            <a:r>
+              <a:rPr sz="1000" b="0" i="0">
+                <a:solidFill>
+                  <a:srgbClr val="6B7A72"/>
+                </a:solidFill>
+                <a:latin typeface="Calibri"/>
+              </a:rPr>
+              <a:t>Basado en el modelo de Ned Herrmann · © 1986</a:t>
             </a:r>
           </a:p>
         </p:txBody>
